--- a/decks/veroax-vc-pitch.pptx
+++ b/decks/veroax-vc-pitch.pptx
@@ -4,6 +4,9 @@
   <p:sldMasterIdLst>
     <p:sldMasterId id="2147483648" r:id="rId1"/>
   </p:sldMasterIdLst>
+  <p:notesMasterIdLst>
+    <p:notesMasterId r:id="rId12"/>
+  </p:notesMasterIdLst>
   <p:sldIdLst>
     <p:sldId id="256" r:id="rId2"/>
     <p:sldId id="257" r:id="rId3"/>
@@ -16,9 +19,6 @@
     <p:sldId id="264" r:id="rId10"/>
     <p:sldId id="265" r:id="rId11"/>
   </p:sldIdLst>
-  <p:notesMasterIdLst>
-    <p:notesMasterId r:id="rId12"/>
-  </p:notesMasterIdLst>
   <p:sldSz cx="12192000" cy="6858000"/>
   <p:notesSz cx="6858000" cy="12192000"/>
   <p:defaultTextStyle>
@@ -113,6 +113,11 @@
       </a:defRPr>
     </a:lvl9pPr>
   </p:defaultTextStyle>
+  <p:extLst>
+    <p:ext uri="{EFAFB233-063F-42B5-8137-9DF3F51BA10A}">
+      <p15:sldGuideLst xmlns:p15="http://schemas.microsoft.com/office/powerpoint/2012/main"/>
+    </p:ext>
+  </p:extLst>
 </p:presentation>
 </file>
 
@@ -138,234 +143,10 @@
           <a:chExt cx="0" cy="0"/>
         </a:xfrm>
       </p:grpSpPr>
-      <p:sp>
-        <p:nvSpPr>
-          <p:cNvPr id="2" name="Header Placeholder 1"/>
-          <p:cNvSpPr>
-            <a:spLocks noGrp="1"/>
-          </p:cNvSpPr>
-          <p:nvPr>
-            <p:ph type="hdr" sz="quarter"/>
-          </p:nvPr>
-        </p:nvSpPr>
-        <p:spPr>
-          <a:xfrm>
-            <a:off x="0" y="0"/>
-            <a:ext cx="2971800" cy="458788"/>
-          </a:xfrm>
-          <a:prstGeom prst="rect">
-            <a:avLst/>
-          </a:prstGeom>
-        </p:spPr>
-        <p:txBody>
-          <a:bodyPr vert="horz" lIns="91440" tIns="45720" rIns="91440" bIns="45720" rtlCol="0"/>
-          <a:lstStyle>
-            <a:lvl1pPr algn="l">
-              <a:defRPr sz="1200"/>
-            </a:lvl1pPr>
-          </a:lstStyle>
-          <a:p>
-            <a:endParaRPr lang="en-US"/>
-          </a:p>
-        </p:txBody>
-      </p:sp>
-      <p:sp>
-        <p:nvSpPr>
-          <p:cNvPr id="3" name="Date Placeholder 2"/>
-          <p:cNvSpPr>
-            <a:spLocks noGrp="1"/>
-          </p:cNvSpPr>
-          <p:nvPr>
-            <p:ph type="dt" idx="1"/>
-          </p:nvPr>
-        </p:nvSpPr>
-        <p:spPr>
-          <a:xfrm>
-            <a:off x="3884613" y="0"/>
-            <a:ext cx="2971800" cy="458788"/>
-          </a:xfrm>
-          <a:prstGeom prst="rect">
-            <a:avLst/>
-          </a:prstGeom>
-        </p:spPr>
-        <p:txBody>
-          <a:bodyPr vert="horz" lIns="91440" tIns="45720" rIns="91440" bIns="45720" rtlCol="0"/>
-          <a:lstStyle>
-            <a:lvl1pPr algn="r">
-              <a:defRPr sz="1200"/>
-            </a:lvl1pPr>
-          </a:lstStyle>
-          <a:p>
-            <a:fld id="{5282F153-3F37-0F45-9E97-73ACFA13230C}" type="datetimeFigureOut">
-              <a:rPr lang="en-US"/>
-              <a:t>7/23/19</a:t>
-            </a:fld>
-            <a:endParaRPr lang="en-US"/>
-          </a:p>
-        </p:txBody>
-      </p:sp>
-      <p:sp>
-        <p:nvSpPr>
-          <p:cNvPr id="4" name="Slide Image Placeholder 3"/>
-          <p:cNvSpPr>
-            <a:spLocks noGrp="1" noRot="1" noChangeAspect="1"/>
-          </p:cNvSpPr>
-          <p:nvPr>
-            <p:ph type="sldImg" idx="2"/>
-          </p:nvPr>
-        </p:nvSpPr>
-        <p:spPr>
-          <a:xfrm>
-            <a:off x="685800" y="1143000"/>
-            <a:ext cx="5486400" cy="3086100"/>
-          </a:xfrm>
-          <a:prstGeom prst="rect">
-            <a:avLst/>
-          </a:prstGeom>
-          <a:noFill/>
-          <a:ln w="12700">
-            <a:solidFill>
-              <a:prstClr val="black"/>
-            </a:solidFill>
-          </a:ln>
-        </p:spPr>
-        <p:txBody>
-          <a:bodyPr vert="horz" lIns="91440" tIns="45720" rIns="91440" bIns="45720" rtlCol="0" anchor="ctr"/>
-          <a:lstStyle/>
-          <a:p>
-            <a:endParaRPr lang="en-US"/>
-          </a:p>
-        </p:txBody>
-      </p:sp>
-      <p:sp>
-        <p:nvSpPr>
-          <p:cNvPr id="5" name="Notes Placeholder 4"/>
-          <p:cNvSpPr>
-            <a:spLocks noGrp="1"/>
-          </p:cNvSpPr>
-          <p:nvPr>
-            <p:ph type="body" sz="quarter" idx="3"/>
-          </p:nvPr>
-        </p:nvSpPr>
-        <p:spPr>
-          <a:xfrm>
-            <a:off x="685800" y="4400550"/>
-            <a:ext cx="5486400" cy="3600450"/>
-          </a:xfrm>
-          <a:prstGeom prst="rect">
-            <a:avLst/>
-          </a:prstGeom>
-        </p:spPr>
-        <p:txBody>
-          <a:bodyPr vert="horz" lIns="91440" tIns="45720" rIns="91440" bIns="45720" rtlCol="0"/>
-          <a:lstStyle/>
-          <a:p>
-            <a:pPr lvl="0"/>
-            <a:r>
-              <a:rPr lang="en-US"/>
-              <a:t>Click to edit Master text styles</a:t>
-            </a:r>
-          </a:p>
-          <a:p>
-            <a:pPr lvl="1"/>
-            <a:r>
-              <a:rPr lang="en-US"/>
-              <a:t>Second level</a:t>
-            </a:r>
-          </a:p>
-          <a:p>
-            <a:pPr lvl="2"/>
-            <a:r>
-              <a:rPr lang="en-US"/>
-              <a:t>Third level</a:t>
-            </a:r>
-          </a:p>
-          <a:p>
-            <a:pPr lvl="3"/>
-            <a:r>
-              <a:rPr lang="en-US"/>
-              <a:t>Fourth level</a:t>
-            </a:r>
-          </a:p>
-          <a:p>
-            <a:pPr lvl="4"/>
-            <a:r>
-              <a:rPr lang="en-US"/>
-              <a:t>Fifth level</a:t>
-            </a:r>
-          </a:p>
-        </p:txBody>
-      </p:sp>
-      <p:sp>
-        <p:nvSpPr>
-          <p:cNvPr id="6" name="Footer Placeholder 5"/>
-          <p:cNvSpPr>
-            <a:spLocks noGrp="1"/>
-          </p:cNvSpPr>
-          <p:nvPr>
-            <p:ph type="ftr" sz="quarter" idx="4"/>
-          </p:nvPr>
-        </p:nvSpPr>
-        <p:spPr>
-          <a:xfrm>
-            <a:off x="0" y="8685213"/>
-            <a:ext cx="2971800" cy="458787"/>
-          </a:xfrm>
-          <a:prstGeom prst="rect">
-            <a:avLst/>
-          </a:prstGeom>
-        </p:spPr>
-        <p:txBody>
-          <a:bodyPr vert="horz" lIns="91440" tIns="45720" rIns="91440" bIns="45720" rtlCol="0" anchor="b"/>
-          <a:lstStyle>
-            <a:lvl1pPr algn="l">
-              <a:defRPr sz="1200"/>
-            </a:lvl1pPr>
-          </a:lstStyle>
-          <a:p>
-            <a:endParaRPr lang="en-US"/>
-          </a:p>
-        </p:txBody>
-      </p:sp>
-      <p:sp>
-        <p:nvSpPr>
-          <p:cNvPr id="7" name="Slide Number Placeholder 6"/>
-          <p:cNvSpPr>
-            <a:spLocks noGrp="1"/>
-          </p:cNvSpPr>
-          <p:nvPr>
-            <p:ph type="sldNum" sz="quarter" idx="5"/>
-          </p:nvPr>
-        </p:nvSpPr>
-        <p:spPr>
-          <a:xfrm>
-            <a:off x="3884613" y="8685213"/>
-            <a:ext cx="2971800" cy="458787"/>
-          </a:xfrm>
-          <a:prstGeom prst="rect">
-            <a:avLst/>
-          </a:prstGeom>
-        </p:spPr>
-        <p:txBody>
-          <a:bodyPr vert="horz" lIns="91440" tIns="45720" rIns="91440" bIns="45720" rtlCol="0" anchor="b"/>
-          <a:lstStyle>
-            <a:lvl1pPr algn="r">
-              <a:defRPr sz="1200"/>
-            </a:lvl1pPr>
-          </a:lstStyle>
-          <a:p>
-            <a:fld id="{CE5E9CC1-C706-0F49-92D6-E571CC5EEA8F}" type="slidenum">
-              <a:rPr lang="en-US"/>
-              <a:t>‹#›</a:t>
-            </a:fld>
-            <a:endParaRPr lang="en-US"/>
-          </a:p>
-        </p:txBody>
-      </p:sp>
     </p:spTree>
     <p:extLst>
       <p:ext uri="{BB962C8B-B14F-4D97-AF65-F5344CB8AC3E}">
-        <p14:creationId xmlns:p14="http://schemas.microsoft.com/office/powerpoint/2010/main" val="1024086991"/>
+        <p14:creationId xmlns:p14="http://schemas.microsoft.com/office/powerpoint/2010/main" val="438124465"/>
       </p:ext>
     </p:extLst>
   </p:cSld>
@@ -509,10 +290,6 @@
           <a:bodyPr/>
           <a:lstStyle/>
           <a:p>
-            <a:r>
-              <a:rPr lang="en-US" dirty="0"/>
-              <a:t/>
-            </a:r>
             <a:endParaRPr lang="en-US" dirty="0"/>
           </a:p>
         </p:txBody>
@@ -597,10 +374,6 @@
           <a:bodyPr/>
           <a:lstStyle/>
           <a:p>
-            <a:r>
-              <a:rPr lang="en-US" dirty="0"/>
-              <a:t/>
-            </a:r>
             <a:endParaRPr lang="en-US" dirty="0"/>
           </a:p>
         </p:txBody>
@@ -685,10 +458,6 @@
           <a:bodyPr/>
           <a:lstStyle/>
           <a:p>
-            <a:r>
-              <a:rPr lang="en-US" dirty="0"/>
-              <a:t/>
-            </a:r>
             <a:endParaRPr lang="en-US" dirty="0"/>
           </a:p>
         </p:txBody>
@@ -773,10 +542,6 @@
           <a:bodyPr/>
           <a:lstStyle/>
           <a:p>
-            <a:r>
-              <a:rPr lang="en-US" dirty="0"/>
-              <a:t/>
-            </a:r>
             <a:endParaRPr lang="en-US" dirty="0"/>
           </a:p>
         </p:txBody>
@@ -861,10 +626,6 @@
           <a:bodyPr/>
           <a:lstStyle/>
           <a:p>
-            <a:r>
-              <a:rPr lang="en-US" dirty="0"/>
-              <a:t/>
-            </a:r>
             <a:endParaRPr lang="en-US" dirty="0"/>
           </a:p>
         </p:txBody>
@@ -949,10 +710,6 @@
           <a:bodyPr/>
           <a:lstStyle/>
           <a:p>
-            <a:r>
-              <a:rPr lang="en-US" dirty="0"/>
-              <a:t/>
-            </a:r>
             <a:endParaRPr lang="en-US" dirty="0"/>
           </a:p>
         </p:txBody>
@@ -1037,10 +794,6 @@
           <a:bodyPr/>
           <a:lstStyle/>
           <a:p>
-            <a:r>
-              <a:rPr lang="en-US" dirty="0"/>
-              <a:t/>
-            </a:r>
             <a:endParaRPr lang="en-US" dirty="0"/>
           </a:p>
         </p:txBody>
@@ -1125,10 +878,6 @@
           <a:bodyPr/>
           <a:lstStyle/>
           <a:p>
-            <a:r>
-              <a:rPr lang="en-US" dirty="0"/>
-              <a:t/>
-            </a:r>
             <a:endParaRPr lang="en-US" dirty="0"/>
           </a:p>
         </p:txBody>
@@ -1213,10 +962,6 @@
           <a:bodyPr/>
           <a:lstStyle/>
           <a:p>
-            <a:r>
-              <a:rPr lang="en-US" dirty="0"/>
-              <a:t/>
-            </a:r>
             <a:endParaRPr lang="en-US" dirty="0"/>
           </a:p>
         </p:txBody>
@@ -1301,10 +1046,6 @@
           <a:bodyPr/>
           <a:lstStyle/>
           <a:p>
-            <a:r>
-              <a:rPr lang="en-US" dirty="0"/>
-              <a:t/>
-            </a:r>
             <a:endParaRPr lang="en-US" dirty="0"/>
           </a:p>
         </p:txBody>
@@ -1378,6 +1119,11 @@
 <file path=ppt/slideMasters/slideMaster1.xml><?xml version="1.0" encoding="utf-8"?>
 <p:sldMaster xmlns:a="http://schemas.openxmlformats.org/drawingml/2006/main" xmlns:r="http://schemas.openxmlformats.org/officeDocument/2006/relationships" xmlns:p="http://schemas.openxmlformats.org/presentationml/2006/main">
   <p:cSld>
+    <p:bg>
+      <p:bgRef idx="1001">
+        <a:schemeClr val="bg1"/>
+      </p:bgRef>
+    </p:bg>
     <p:spTree>
       <p:nvGrpSpPr>
         <p:cNvPr id="1" name=""/>
@@ -1660,6 +1406,7 @@
         <a:solidFill>
           <a:srgbClr val="0F0E2E"/>
         </a:solidFill>
+        <a:effectLst/>
       </p:bgPr>
     </p:bg>
     <p:spTree>
@@ -1700,6 +1447,13 @@
             <a:prstDash val="solid"/>
           </a:ln>
         </p:spPr>
+        <p:txBody>
+          <a:bodyPr/>
+          <a:lstStyle/>
+          <a:p>
+            <a:endParaRPr lang="en-US"/>
+          </a:p>
+        </p:txBody>
       </p:sp>
       <p:sp>
         <p:nvSpPr>
@@ -1725,6 +1479,13 @@
             <a:prstDash val="solid"/>
           </a:ln>
         </p:spPr>
+        <p:txBody>
+          <a:bodyPr/>
+          <a:lstStyle/>
+          <a:p>
+            <a:endParaRPr lang="en-US"/>
+          </a:p>
+        </p:txBody>
       </p:sp>
       <p:sp>
         <p:nvSpPr>
@@ -1747,11 +1508,11 @@
           <a:bodyPr wrap="square" lIns="0" tIns="0" rIns="0" bIns="0" rtlCol="0" anchor="ctr"/>
           <a:lstStyle/>
           <a:p>
-            <a:pPr indent="0" marL="0">
-              <a:buNone/>
-            </a:pPr>
-            <a:r>
-              <a:rPr lang="en-US" sz="1200" b="1" spc="600" kern="0" dirty="0">
+            <a:pPr marL="0" indent="0">
+              <a:buNone/>
+            </a:pPr>
+            <a:r>
+              <a:rPr lang="en-US" sz="1200" b="1" kern="0" spc="600" dirty="0">
                 <a:solidFill>
                   <a:srgbClr val="FCD34D"/>
                 </a:solidFill>
@@ -1786,7 +1547,7 @@
           <a:bodyPr wrap="square" lIns="0" tIns="0" rIns="0" bIns="0" rtlCol="0" anchor="ctr"/>
           <a:lstStyle/>
           <a:p>
-            <a:pPr indent="0" marL="0">
+            <a:pPr marL="0" indent="0">
               <a:buNone/>
             </a:pPr>
             <a:r>
@@ -1800,9 +1561,6 @@
               </a:rPr>
               <a:t>veroax</a:t>
             </a:r>
-            <a:pPr indent="0" marL="0">
-              <a:buNone/>
-            </a:pPr>
             <a:r>
               <a:rPr lang="en-US" sz="7800" b="1" dirty="0">
                 <a:solidFill>
@@ -1839,7 +1597,7 @@
           <a:bodyPr wrap="square" lIns="0" tIns="0" rIns="0" bIns="0" rtlCol="0" anchor="ctr"/>
           <a:lstStyle/>
           <a:p>
-            <a:pPr indent="0" marL="0">
+            <a:pPr marL="0" indent="0">
               <a:buNone/>
             </a:pPr>
             <a:r>
@@ -1878,7 +1636,7 @@
           <a:bodyPr wrap="square" lIns="0" tIns="0" rIns="0" bIns="0" rtlCol="0" anchor="ctr"/>
           <a:lstStyle/>
           <a:p>
-            <a:pPr indent="0" marL="0">
+            <a:pPr marL="0" indent="0">
               <a:spcAft>
                 <a:spcPts val="800"/>
               </a:spcAft>
@@ -1893,7 +1651,7 @@
                 <a:ea typeface="Calibri Light" pitchFamily="34" charset="-122"/>
                 <a:cs typeface="Calibri Light" pitchFamily="34" charset="-120"/>
               </a:rPr>
-              <a:t>We turn a 200 to 700 page California disclosure package into a polished, severity-rated, regionally-priced buyer report in 90 seconds. Agents win deals. Buyers stop getting blindsided.</a:t>
+              <a:t>We turn a 200 to 700 page California disclosure package into a polished, severity-rated, regionally-priced buyer report in minutes. Agents win deals. Buyers stop getting blindsided.</a:t>
             </a:r>
             <a:endParaRPr lang="en-US" sz="1800" dirty="0"/>
           </a:p>
@@ -1920,7 +1678,7 @@
           <a:bodyPr wrap="square" lIns="0" tIns="0" rIns="0" bIns="0" rtlCol="0" anchor="ctr"/>
           <a:lstStyle/>
           <a:p>
-            <a:pPr indent="0" marL="0">
+            <a:pPr marL="0" indent="0">
               <a:buNone/>
             </a:pPr>
             <a:r>
@@ -1934,9 +1692,6 @@
               </a:rPr>
               <a:t>Michael Fielden, Founder</a:t>
             </a:r>
-            <a:pPr indent="0" marL="0">
-              <a:buNone/>
-            </a:pPr>
             <a:r>
               <a:rPr lang="en-US" sz="1200" dirty="0">
                 <a:solidFill>
@@ -1948,9 +1703,6 @@
               </a:rPr>
               <a:t>  •  </a:t>
             </a:r>
-            <a:pPr indent="0" marL="0">
-              <a:buNone/>
-            </a:pPr>
             <a:r>
               <a:rPr lang="en-US" sz="1200" dirty="0">
                 <a:solidFill>
@@ -1962,9 +1714,6 @@
               </a:rPr>
               <a:t>michael@michaelfielden.com</a:t>
             </a:r>
-            <a:pPr indent="0" marL="0">
-              <a:buNone/>
-            </a:pPr>
             <a:r>
               <a:rPr lang="en-US" sz="1200" dirty="0">
                 <a:solidFill>
@@ -1976,9 +1725,6 @@
               </a:rPr>
               <a:t>  •  </a:t>
             </a:r>
-            <a:pPr indent="0" marL="0">
-              <a:buNone/>
-            </a:pPr>
             <a:r>
               <a:rPr lang="en-US" sz="1200" dirty="0">
                 <a:solidFill>
@@ -2010,6 +1756,7 @@
         <a:solidFill>
           <a:srgbClr val="0F0E2E"/>
         </a:solidFill>
+        <a:effectLst/>
       </p:bgPr>
     </p:bg>
     <p:spTree>
@@ -2045,6 +1792,13 @@
           </a:solidFill>
           <a:ln/>
         </p:spPr>
+        <p:txBody>
+          <a:bodyPr/>
+          <a:lstStyle/>
+          <a:p>
+            <a:endParaRPr lang="en-US"/>
+          </a:p>
+        </p:txBody>
       </p:sp>
       <p:sp>
         <p:nvSpPr>
@@ -2065,6 +1819,13 @@
           </a:solidFill>
           <a:ln/>
         </p:spPr>
+        <p:txBody>
+          <a:bodyPr/>
+          <a:lstStyle/>
+          <a:p>
+            <a:endParaRPr lang="en-US"/>
+          </a:p>
+        </p:txBody>
       </p:sp>
       <p:sp>
         <p:nvSpPr>
@@ -2087,11 +1848,11 @@
           <a:bodyPr wrap="square" lIns="0" tIns="0" rIns="0" bIns="0" rtlCol="0" anchor="ctr"/>
           <a:lstStyle/>
           <a:p>
-            <a:pPr indent="0" marL="0">
-              <a:buNone/>
-            </a:pPr>
-            <a:r>
-              <a:rPr lang="en-US" sz="1400" b="1" spc="600" kern="0" dirty="0">
+            <a:pPr marL="0" indent="0">
+              <a:buNone/>
+            </a:pPr>
+            <a:r>
+              <a:rPr lang="en-US" sz="1400" b="1" kern="0" spc="600" dirty="0">
                 <a:solidFill>
                   <a:srgbClr val="FCD34D"/>
                 </a:solidFill>
@@ -2126,7 +1887,7 @@
           <a:bodyPr wrap="square" lIns="0" tIns="0" rIns="0" bIns="0" rtlCol="0" anchor="ctr"/>
           <a:lstStyle/>
           <a:p>
-            <a:pPr indent="0" marL="0">
+            <a:pPr marL="0" indent="0">
               <a:lnSpc>
                 <a:spcPct val="115000"/>
               </a:lnSpc>
@@ -2168,7 +1929,7 @@
           <a:bodyPr wrap="square" lIns="0" tIns="0" rIns="0" bIns="0" rtlCol="0" anchor="ctr"/>
           <a:lstStyle/>
           <a:p>
-            <a:pPr indent="0" marL="0">
+            <a:pPr marL="0" indent="0">
               <a:lnSpc>
                 <a:spcPct val="140000"/>
               </a:lnSpc>
@@ -2213,6 +1974,13 @@
             <a:prstDash val="solid"/>
           </a:ln>
         </p:spPr>
+        <p:txBody>
+          <a:bodyPr/>
+          <a:lstStyle/>
+          <a:p>
+            <a:endParaRPr lang="en-US"/>
+          </a:p>
+        </p:txBody>
       </p:sp>
       <p:sp>
         <p:nvSpPr>
@@ -2235,7 +2003,7 @@
           <a:bodyPr wrap="square" lIns="0" tIns="0" rIns="0" bIns="0" rtlCol="0" anchor="ctr"/>
           <a:lstStyle/>
           <a:p>
-            <a:pPr indent="0" marL="0">
+            <a:pPr marL="0" indent="0">
               <a:buNone/>
             </a:pPr>
             <a:r>
@@ -2274,7 +2042,7 @@
           <a:bodyPr wrap="square" lIns="0" tIns="0" rIns="0" bIns="0" rtlCol="0" anchor="ctr"/>
           <a:lstStyle/>
           <a:p>
-            <a:pPr indent="0" marL="0">
+            <a:pPr marL="0" indent="0">
               <a:buNone/>
             </a:pPr>
             <a:r>
@@ -2313,7 +2081,7 @@
           <a:bodyPr wrap="square" lIns="0" tIns="0" rIns="0" bIns="0" rtlCol="0" anchor="ctr"/>
           <a:lstStyle/>
           <a:p>
-            <a:pPr indent="0" marL="0">
+            <a:pPr marL="0" indent="0">
               <a:buNone/>
             </a:pPr>
             <a:r>
@@ -2352,7 +2120,7 @@
           <a:bodyPr wrap="square" lIns="0" tIns="0" rIns="0" bIns="0" rtlCol="0" anchor="ctr"/>
           <a:lstStyle/>
           <a:p>
-            <a:pPr indent="0" marL="0">
+            <a:pPr marL="0" indent="0">
               <a:buNone/>
             </a:pPr>
             <a:r>
@@ -2391,7 +2159,7 @@
           <a:bodyPr wrap="square" lIns="0" tIns="0" rIns="0" bIns="0" rtlCol="0" anchor="ctr"/>
           <a:lstStyle/>
           <a:p>
-            <a:pPr indent="0" marL="0">
+            <a:pPr marL="0" indent="0">
               <a:buNone/>
             </a:pPr>
             <a:r>
@@ -2430,7 +2198,7 @@
           <a:bodyPr wrap="square" lIns="0" tIns="0" rIns="0" bIns="0" rtlCol="0" anchor="ctr"/>
           <a:lstStyle/>
           <a:p>
-            <a:pPr indent="0" marL="0">
+            <a:pPr marL="0" indent="0">
               <a:buNone/>
             </a:pPr>
             <a:r>
@@ -2469,7 +2237,7 @@
           <a:bodyPr wrap="square" lIns="0" tIns="0" rIns="0" bIns="0" rtlCol="0" anchor="ctr"/>
           <a:lstStyle/>
           <a:p>
-            <a:pPr algn="r" indent="0" marL="0">
+            <a:pPr marL="0" indent="0" algn="r">
               <a:buNone/>
             </a:pPr>
             <a:r>
@@ -2483,9 +2251,6 @@
               </a:rPr>
               <a:t>veroax</a:t>
             </a:r>
-            <a:pPr algn="r" indent="0" marL="0">
-              <a:buNone/>
-            </a:pPr>
             <a:r>
               <a:rPr lang="en-US" sz="2200" b="1" dirty="0">
                 <a:solidFill>
@@ -2517,6 +2282,7 @@
         <a:solidFill>
           <a:srgbClr val="FAF8F2"/>
         </a:solidFill>
+        <a:effectLst/>
       </p:bgPr>
     </p:bg>
     <p:spTree>
@@ -2554,11 +2320,11 @@
           <a:bodyPr wrap="square" lIns="0" tIns="0" rIns="0" bIns="0" rtlCol="0" anchor="ctr"/>
           <a:lstStyle/>
           <a:p>
-            <a:pPr indent="0" marL="0">
-              <a:buNone/>
-            </a:pPr>
-            <a:r>
-              <a:rPr lang="en-US" sz="900" b="1" spc="400" kern="0" dirty="0">
+            <a:pPr marL="0" indent="0">
+              <a:buNone/>
+            </a:pPr>
+            <a:r>
+              <a:rPr lang="en-US" sz="900" b="1" kern="0" spc="400" dirty="0">
                 <a:solidFill>
                   <a:srgbClr val="64748B"/>
                 </a:solidFill>
@@ -2593,7 +2359,7 @@
           <a:bodyPr wrap="square" lIns="0" tIns="0" rIns="0" bIns="0" rtlCol="0" anchor="ctr"/>
           <a:lstStyle/>
           <a:p>
-            <a:pPr indent="0" marL="0">
+            <a:pPr marL="0" indent="0">
               <a:buNone/>
             </a:pPr>
             <a:r>
@@ -2632,7 +2398,7 @@
           <a:bodyPr wrap="square" lIns="0" tIns="0" rIns="0" bIns="0" rtlCol="0" anchor="ctr"/>
           <a:lstStyle/>
           <a:p>
-            <a:pPr indent="0" marL="0">
+            <a:pPr marL="0" indent="0">
               <a:lnSpc>
                 <a:spcPct val="130000"/>
               </a:lnSpc>
@@ -2647,7 +2413,7 @@
                 <a:ea typeface="Calibri" pitchFamily="34" charset="-122"/>
                 <a:cs typeface="Calibri" pitchFamily="34" charset="-120"/>
               </a:rPr>
-              <a:t>Every California residential resale ships with 200 to 700 pages of disclosures: TDS, SPQ, AVID, NHD, HOA documents, inspection reports, third-party reports. Buyer's agents have hours, not days. So they skim.</a:t>
+              <a:t>Every California residential resale ships with 200 to 700+ pages of disclosures: TDS, SPQ, AVID, NHD, HOA documents, inspection reports, third-party reports. Buyer's agents have hours, not days. So they skim or just simply pass them on to the buyer to fend for themselves.</a:t>
             </a:r>
             <a:endParaRPr lang="en-US" sz="1700" dirty="0"/>
           </a:p>
@@ -2677,6 +2443,13 @@
             <a:prstDash val="solid"/>
           </a:ln>
         </p:spPr>
+        <p:txBody>
+          <a:bodyPr/>
+          <a:lstStyle/>
+          <a:p>
+            <a:endParaRPr lang="en-US"/>
+          </a:p>
+        </p:txBody>
       </p:sp>
       <p:sp>
         <p:nvSpPr>
@@ -2699,7 +2472,7 @@
           <a:bodyPr wrap="square" lIns="0" tIns="0" rIns="0" bIns="0" rtlCol="0" anchor="ctr"/>
           <a:lstStyle/>
           <a:p>
-            <a:pPr indent="0" marL="0">
+            <a:pPr marL="0" indent="0">
               <a:buNone/>
             </a:pPr>
             <a:r>
@@ -2711,7 +2484,7 @@
                 <a:ea typeface="Calibri" pitchFamily="34" charset="-122"/>
                 <a:cs typeface="Calibri" pitchFamily="34" charset="-120"/>
               </a:rPr>
-              <a:t>200-700</a:t>
+              <a:t>200-700+</a:t>
             </a:r>
             <a:endParaRPr lang="en-US" sz="2600" dirty="0"/>
           </a:p>
@@ -2738,7 +2511,7 @@
           <a:bodyPr wrap="square" lIns="0" tIns="0" rIns="0" bIns="0" rtlCol="0" anchor="ctr"/>
           <a:lstStyle/>
           <a:p>
-            <a:pPr indent="0" marL="0">
+            <a:pPr marL="0" indent="0">
               <a:lnSpc>
                 <a:spcPct val="120000"/>
               </a:lnSpc>
@@ -2783,6 +2556,13 @@
             <a:prstDash val="solid"/>
           </a:ln>
         </p:spPr>
+        <p:txBody>
+          <a:bodyPr/>
+          <a:lstStyle/>
+          <a:p>
+            <a:endParaRPr lang="en-US"/>
+          </a:p>
+        </p:txBody>
       </p:sp>
       <p:sp>
         <p:nvSpPr>
@@ -2805,7 +2585,7 @@
           <a:bodyPr wrap="square" lIns="0" tIns="0" rIns="0" bIns="0" rtlCol="0" anchor="ctr"/>
           <a:lstStyle/>
           <a:p>
-            <a:pPr indent="0" marL="0">
+            <a:pPr marL="0" indent="0">
               <a:buNone/>
             </a:pPr>
             <a:r>
@@ -2844,7 +2624,7 @@
           <a:bodyPr wrap="square" lIns="0" tIns="0" rIns="0" bIns="0" rtlCol="0" anchor="ctr"/>
           <a:lstStyle/>
           <a:p>
-            <a:pPr indent="0" marL="0">
+            <a:pPr marL="0" indent="0">
               <a:lnSpc>
                 <a:spcPct val="120000"/>
               </a:lnSpc>
@@ -2889,6 +2669,13 @@
             <a:prstDash val="solid"/>
           </a:ln>
         </p:spPr>
+        <p:txBody>
+          <a:bodyPr/>
+          <a:lstStyle/>
+          <a:p>
+            <a:endParaRPr lang="en-US"/>
+          </a:p>
+        </p:txBody>
       </p:sp>
       <p:sp>
         <p:nvSpPr>
@@ -2911,7 +2698,7 @@
           <a:bodyPr wrap="square" lIns="0" tIns="0" rIns="0" bIns="0" rtlCol="0" anchor="ctr"/>
           <a:lstStyle/>
           <a:p>
-            <a:pPr indent="0" marL="0">
+            <a:pPr marL="0" indent="0">
               <a:buNone/>
             </a:pPr>
             <a:r>
@@ -2950,7 +2737,7 @@
           <a:bodyPr wrap="square" lIns="0" tIns="0" rIns="0" bIns="0" rtlCol="0" anchor="ctr"/>
           <a:lstStyle/>
           <a:p>
-            <a:pPr indent="0" marL="0">
+            <a:pPr marL="0" indent="0">
               <a:lnSpc>
                 <a:spcPct val="120000"/>
               </a:lnSpc>
@@ -2995,6 +2782,13 @@
             <a:prstDash val="solid"/>
           </a:ln>
         </p:spPr>
+        <p:txBody>
+          <a:bodyPr/>
+          <a:lstStyle/>
+          <a:p>
+            <a:endParaRPr lang="en-US"/>
+          </a:p>
+        </p:txBody>
       </p:sp>
       <p:sp>
         <p:nvSpPr>
@@ -3017,7 +2811,7 @@
           <a:bodyPr wrap="square" lIns="0" tIns="0" rIns="0" bIns="0" rtlCol="0" anchor="ctr"/>
           <a:lstStyle/>
           <a:p>
-            <a:pPr indent="0" marL="0">
+            <a:pPr marL="0" indent="0">
               <a:buNone/>
             </a:pPr>
             <a:r>
@@ -3056,7 +2850,7 @@
           <a:bodyPr wrap="square" lIns="0" tIns="0" rIns="0" bIns="0" rtlCol="0" anchor="ctr"/>
           <a:lstStyle/>
           <a:p>
-            <a:pPr indent="0" marL="0">
+            <a:pPr marL="0" indent="0">
               <a:lnSpc>
                 <a:spcPct val="120000"/>
               </a:lnSpc>
@@ -3071,7 +2865,7 @@
                 <a:ea typeface="Calibri" pitchFamily="34" charset="-122"/>
                 <a:cs typeface="Calibri" pitchFamily="34" charset="-120"/>
               </a:rPr>
-              <a:t>of CA deals hit a renegotiation moment a careful read could have flagged earlier (practitioner estimate)</a:t>
+              <a:t>of CA deals hit a renegotiation moment a careful read could have flagged earlier</a:t>
             </a:r>
             <a:endParaRPr lang="en-US" sz="1000" dirty="0"/>
           </a:p>
@@ -3098,7 +2892,7 @@
           <a:bodyPr wrap="square" lIns="0" tIns="0" rIns="0" bIns="0" rtlCol="0" anchor="ctr"/>
           <a:lstStyle/>
           <a:p>
-            <a:pPr indent="0" marL="0">
+            <a:pPr marL="0" indent="0">
               <a:lnSpc>
                 <a:spcPct val="135000"/>
               </a:lnSpc>
@@ -3140,7 +2934,7 @@
           <a:bodyPr wrap="square" lIns="0" tIns="0" rIns="0" bIns="0" rtlCol="0" anchor="ctr"/>
           <a:lstStyle/>
           <a:p>
-            <a:pPr algn="r" indent="0" marL="0">
+            <a:pPr marL="0" indent="0" algn="r">
               <a:buNone/>
             </a:pPr>
             <a:r>
@@ -3154,9 +2948,6 @@
               </a:rPr>
               <a:t>veroax</a:t>
             </a:r>
-            <a:pPr algn="r" indent="0" marL="0">
-              <a:buNone/>
-            </a:pPr>
             <a:r>
               <a:rPr lang="en-US" sz="1200" b="1" dirty="0">
                 <a:solidFill>
@@ -3188,6 +2979,7 @@
         <a:solidFill>
           <a:srgbClr val="FFFFFF"/>
         </a:solidFill>
+        <a:effectLst/>
       </p:bgPr>
     </p:bg>
     <p:spTree>
@@ -3225,11 +3017,11 @@
           <a:bodyPr wrap="square" lIns="0" tIns="0" rIns="0" bIns="0" rtlCol="0" anchor="ctr"/>
           <a:lstStyle/>
           <a:p>
-            <a:pPr indent="0" marL="0">
-              <a:buNone/>
-            </a:pPr>
-            <a:r>
-              <a:rPr lang="en-US" sz="900" b="1" spc="400" kern="0" dirty="0">
+            <a:pPr marL="0" indent="0">
+              <a:buNone/>
+            </a:pPr>
+            <a:r>
+              <a:rPr lang="en-US" sz="900" b="1" kern="0" spc="400" dirty="0">
                 <a:solidFill>
                   <a:srgbClr val="64748B"/>
                 </a:solidFill>
@@ -3264,7 +3056,7 @@
           <a:bodyPr wrap="square" lIns="0" tIns="0" rIns="0" bIns="0" rtlCol="0" anchor="ctr"/>
           <a:lstStyle/>
           <a:p>
-            <a:pPr indent="0" marL="0">
+            <a:pPr marL="0" indent="0">
               <a:buNone/>
             </a:pPr>
             <a:r>
@@ -3276,7 +3068,7 @@
                 <a:ea typeface="Calibri" pitchFamily="34" charset="-122"/>
                 <a:cs typeface="Calibri" pitchFamily="34" charset="-120"/>
               </a:rPr>
-              <a:t>Upload the package. Deliver a defensible review in 90 seconds.</a:t>
+              <a:t>Upload the package. Deliver a defensible review in minutes.</a:t>
             </a:r>
             <a:endParaRPr lang="en-US" sz="3200" dirty="0"/>
           </a:p>
@@ -3301,6 +3093,13 @@
           </a:solidFill>
           <a:ln/>
         </p:spPr>
+        <p:txBody>
+          <a:bodyPr/>
+          <a:lstStyle/>
+          <a:p>
+            <a:endParaRPr lang="en-US"/>
+          </a:p>
+        </p:txBody>
       </p:sp>
       <p:sp>
         <p:nvSpPr>
@@ -3321,6 +3120,13 @@
           </a:solidFill>
           <a:ln/>
         </p:spPr>
+        <p:txBody>
+          <a:bodyPr/>
+          <a:lstStyle/>
+          <a:p>
+            <a:endParaRPr lang="en-US"/>
+          </a:p>
+        </p:txBody>
       </p:sp>
       <p:sp>
         <p:nvSpPr>
@@ -3341,6 +3147,13 @@
           </a:solidFill>
           <a:ln/>
         </p:spPr>
+        <p:txBody>
+          <a:bodyPr/>
+          <a:lstStyle/>
+          <a:p>
+            <a:endParaRPr lang="en-US"/>
+          </a:p>
+        </p:txBody>
       </p:sp>
       <p:sp>
         <p:nvSpPr>
@@ -3363,7 +3176,7 @@
           <a:bodyPr wrap="square" lIns="0" tIns="0" rIns="0" bIns="0" rtlCol="0" anchor="ctr"/>
           <a:lstStyle/>
           <a:p>
-            <a:pPr algn="ctr" indent="0" marL="0">
+            <a:pPr marL="0" indent="0" algn="ctr">
               <a:buNone/>
             </a:pPr>
             <a:r>
@@ -3402,7 +3215,7 @@
           <a:bodyPr wrap="square" lIns="0" tIns="0" rIns="0" bIns="0" rtlCol="0" anchor="ctr"/>
           <a:lstStyle/>
           <a:p>
-            <a:pPr indent="0" marL="0">
+            <a:pPr marL="0" indent="0">
               <a:buNone/>
             </a:pPr>
             <a:r>
@@ -3441,7 +3254,7 @@
           <a:bodyPr wrap="square" lIns="0" tIns="0" rIns="0" bIns="0" rtlCol="0" anchor="ctr"/>
           <a:lstStyle/>
           <a:p>
-            <a:pPr indent="0" marL="0">
+            <a:pPr marL="0" indent="0">
               <a:lnSpc>
                 <a:spcPct val="135000"/>
               </a:lnSpc>
@@ -3456,7 +3269,7 @@
                 <a:ea typeface="Calibri" pitchFamily="34" charset="-122"/>
                 <a:cs typeface="Calibri" pitchFamily="34" charset="-120"/>
               </a:rPr>
-              <a:t>Native PDF attachments for seller disclosures and inspection reports (Claude sees check-boxes, signatures, side-by-side tables). Text extraction for HOA bundles. Temperature locked at 0 so re-runs match.</a:t>
+              <a:t>Native PDF attachments for seller disclosures and inspection reports (AI sees check-boxes, signatures, side-by-side tables). Text extraction for HOA bundles. Temperature locked at 0 so re-runs match.</a:t>
             </a:r>
             <a:endParaRPr lang="en-US" sz="1200" dirty="0"/>
           </a:p>
@@ -3481,6 +3294,13 @@
           </a:solidFill>
           <a:ln/>
         </p:spPr>
+        <p:txBody>
+          <a:bodyPr/>
+          <a:lstStyle/>
+          <a:p>
+            <a:endParaRPr lang="en-US"/>
+          </a:p>
+        </p:txBody>
       </p:sp>
       <p:sp>
         <p:nvSpPr>
@@ -3501,6 +3321,13 @@
           </a:solidFill>
           <a:ln/>
         </p:spPr>
+        <p:txBody>
+          <a:bodyPr/>
+          <a:lstStyle/>
+          <a:p>
+            <a:endParaRPr lang="en-US"/>
+          </a:p>
+        </p:txBody>
       </p:sp>
       <p:sp>
         <p:nvSpPr>
@@ -3521,6 +3348,13 @@
           </a:solidFill>
           <a:ln/>
         </p:spPr>
+        <p:txBody>
+          <a:bodyPr/>
+          <a:lstStyle/>
+          <a:p>
+            <a:endParaRPr lang="en-US"/>
+          </a:p>
+        </p:txBody>
       </p:sp>
       <p:sp>
         <p:nvSpPr>
@@ -3543,7 +3377,7 @@
           <a:bodyPr wrap="square" lIns="0" tIns="0" rIns="0" bIns="0" rtlCol="0" anchor="ctr"/>
           <a:lstStyle/>
           <a:p>
-            <a:pPr algn="ctr" indent="0" marL="0">
+            <a:pPr marL="0" indent="0" algn="ctr">
               <a:buNone/>
             </a:pPr>
             <a:r>
@@ -3582,7 +3416,7 @@
           <a:bodyPr wrap="square" lIns="0" tIns="0" rIns="0" bIns="0" rtlCol="0" anchor="ctr"/>
           <a:lstStyle/>
           <a:p>
-            <a:pPr indent="0" marL="0">
+            <a:pPr marL="0" indent="0">
               <a:buNone/>
             </a:pPr>
             <a:r>
@@ -3621,7 +3455,7 @@
           <a:bodyPr wrap="square" lIns="0" tIns="0" rIns="0" bIns="0" rtlCol="0" anchor="ctr"/>
           <a:lstStyle/>
           <a:p>
-            <a:pPr indent="0" marL="0">
+            <a:pPr marL="0" indent="0">
               <a:lnSpc>
                 <a:spcPct val="135000"/>
               </a:lnSpc>
@@ -3661,6 +3495,13 @@
           </a:solidFill>
           <a:ln/>
         </p:spPr>
+        <p:txBody>
+          <a:bodyPr/>
+          <a:lstStyle/>
+          <a:p>
+            <a:endParaRPr lang="en-US"/>
+          </a:p>
+        </p:txBody>
       </p:sp>
       <p:sp>
         <p:nvSpPr>
@@ -3681,6 +3522,13 @@
           </a:solidFill>
           <a:ln/>
         </p:spPr>
+        <p:txBody>
+          <a:bodyPr/>
+          <a:lstStyle/>
+          <a:p>
+            <a:endParaRPr lang="en-US"/>
+          </a:p>
+        </p:txBody>
       </p:sp>
       <p:sp>
         <p:nvSpPr>
@@ -3701,6 +3549,13 @@
           </a:solidFill>
           <a:ln/>
         </p:spPr>
+        <p:txBody>
+          <a:bodyPr/>
+          <a:lstStyle/>
+          <a:p>
+            <a:endParaRPr lang="en-US"/>
+          </a:p>
+        </p:txBody>
       </p:sp>
       <p:sp>
         <p:nvSpPr>
@@ -3723,7 +3578,7 @@
           <a:bodyPr wrap="square" lIns="0" tIns="0" rIns="0" bIns="0" rtlCol="0" anchor="ctr"/>
           <a:lstStyle/>
           <a:p>
-            <a:pPr algn="ctr" indent="0" marL="0">
+            <a:pPr marL="0" indent="0" algn="ctr">
               <a:buNone/>
             </a:pPr>
             <a:r>
@@ -3762,7 +3617,7 @@
           <a:bodyPr wrap="square" lIns="0" tIns="0" rIns="0" bIns="0" rtlCol="0" anchor="ctr"/>
           <a:lstStyle/>
           <a:p>
-            <a:pPr indent="0" marL="0">
+            <a:pPr marL="0" indent="0">
               <a:buNone/>
             </a:pPr>
             <a:r>
@@ -3801,7 +3656,7 @@
           <a:bodyPr wrap="square" lIns="0" tIns="0" rIns="0" bIns="0" rtlCol="0" anchor="ctr"/>
           <a:lstStyle/>
           <a:p>
-            <a:pPr indent="0" marL="0">
+            <a:pPr marL="0" indent="0">
               <a:lnSpc>
                 <a:spcPct val="135000"/>
               </a:lnSpc>
@@ -3843,7 +3698,7 @@
           <a:bodyPr wrap="square" lIns="0" tIns="0" rIns="0" bIns="0" rtlCol="0" anchor="ctr"/>
           <a:lstStyle/>
           <a:p>
-            <a:pPr indent="0" marL="0">
+            <a:pPr marL="0" indent="0">
               <a:buNone/>
             </a:pPr>
             <a:r>
@@ -3882,7 +3737,7 @@
           <a:bodyPr wrap="square" lIns="0" tIns="0" rIns="0" bIns="0" rtlCol="0" anchor="ctr"/>
           <a:lstStyle/>
           <a:p>
-            <a:pPr algn="r" indent="0" marL="0">
+            <a:pPr marL="0" indent="0" algn="r">
               <a:buNone/>
             </a:pPr>
             <a:r>
@@ -3896,9 +3751,6 @@
               </a:rPr>
               <a:t>veroax</a:t>
             </a:r>
-            <a:pPr algn="r" indent="0" marL="0">
-              <a:buNone/>
-            </a:pPr>
             <a:r>
               <a:rPr lang="en-US" sz="1200" b="1" dirty="0">
                 <a:solidFill>
@@ -3930,6 +3782,7 @@
         <a:solidFill>
           <a:srgbClr val="FFFFFF"/>
         </a:solidFill>
+        <a:effectLst/>
       </p:bgPr>
     </p:bg>
     <p:spTree>
@@ -3967,11 +3820,11 @@
           <a:bodyPr wrap="square" lIns="0" tIns="0" rIns="0" bIns="0" rtlCol="0" anchor="ctr"/>
           <a:lstStyle/>
           <a:p>
-            <a:pPr indent="0" marL="0">
-              <a:buNone/>
-            </a:pPr>
-            <a:r>
-              <a:rPr lang="en-US" sz="900" b="1" spc="400" kern="0" dirty="0">
+            <a:pPr marL="0" indent="0">
+              <a:buNone/>
+            </a:pPr>
+            <a:r>
+              <a:rPr lang="en-US" sz="900" b="1" kern="0" spc="400" dirty="0">
                 <a:solidFill>
                   <a:srgbClr val="64748B"/>
                 </a:solidFill>
@@ -4006,7 +3859,7 @@
           <a:bodyPr wrap="square" lIns="0" tIns="0" rIns="0" bIns="0" rtlCol="0" anchor="ctr"/>
           <a:lstStyle/>
           <a:p>
-            <a:pPr indent="0" marL="0">
+            <a:pPr marL="0" indent="0">
               <a:buNone/>
             </a:pPr>
             <a:r>
@@ -4045,7 +3898,7 @@
           <a:bodyPr wrap="square" lIns="0" tIns="0" rIns="0" bIns="0" rtlCol="0" anchor="ctr"/>
           <a:lstStyle/>
           <a:p>
-            <a:pPr indent="0" marL="0">
+            <a:pPr marL="0" indent="0">
               <a:buNone/>
             </a:pPr>
             <a:r>
@@ -4057,7 +3910,7 @@
                 <a:ea typeface="Calibri" pitchFamily="34" charset="-122"/>
                 <a:cs typeface="Calibri" pitchFamily="34" charset="-120"/>
               </a:rPr>
-              <a:t>From upload to client-ready deliverable in three steps. The agent stays in the loop on the last one.</a:t>
+              <a:t>From upload to client-ready deliverable in three steps. The agent stays in the loop all the way through and the presentation is theirs, branded to them.</a:t>
             </a:r>
             <a:endParaRPr lang="en-US" sz="1400" dirty="0"/>
           </a:p>
@@ -4082,6 +3935,13 @@
           </a:solidFill>
           <a:ln/>
         </p:spPr>
+        <p:txBody>
+          <a:bodyPr/>
+          <a:lstStyle/>
+          <a:p>
+            <a:endParaRPr lang="en-US"/>
+          </a:p>
+        </p:txBody>
       </p:sp>
       <p:sp>
         <p:nvSpPr>
@@ -4104,7 +3964,7 @@
           <a:bodyPr wrap="square" lIns="0" tIns="0" rIns="0" bIns="0" rtlCol="0" anchor="ctr"/>
           <a:lstStyle/>
           <a:p>
-            <a:pPr algn="ctr" indent="0" marL="0">
+            <a:pPr marL="0" indent="0" algn="ctr">
               <a:buNone/>
             </a:pPr>
             <a:r>
@@ -4143,7 +4003,7 @@
           <a:bodyPr wrap="square" lIns="0" tIns="0" rIns="0" bIns="0" rtlCol="0" anchor="ctr"/>
           <a:lstStyle/>
           <a:p>
-            <a:pPr indent="0" marL="0">
+            <a:pPr marL="0" indent="0">
               <a:buNone/>
             </a:pPr>
             <a:r>
@@ -4182,7 +4042,7 @@
           <a:bodyPr wrap="square" lIns="0" tIns="0" rIns="0" bIns="0" rtlCol="0" anchor="ctr"/>
           <a:lstStyle/>
           <a:p>
-            <a:pPr indent="0" marL="0">
+            <a:pPr marL="0" indent="0">
               <a:lnSpc>
                 <a:spcPct val="130000"/>
               </a:lnSpc>
@@ -4222,6 +4082,13 @@
           </a:solidFill>
           <a:ln/>
         </p:spPr>
+        <p:txBody>
+          <a:bodyPr/>
+          <a:lstStyle/>
+          <a:p>
+            <a:endParaRPr lang="en-US"/>
+          </a:p>
+        </p:txBody>
       </p:sp>
       <p:sp>
         <p:nvSpPr>
@@ -4244,7 +4111,7 @@
           <a:bodyPr wrap="square" lIns="0" tIns="0" rIns="0" bIns="0" rtlCol="0" anchor="ctr"/>
           <a:lstStyle/>
           <a:p>
-            <a:pPr algn="ctr" indent="0" marL="0">
+            <a:pPr marL="0" indent="0" algn="ctr">
               <a:buNone/>
             </a:pPr>
             <a:r>
@@ -4283,7 +4150,7 @@
           <a:bodyPr wrap="square" lIns="0" tIns="0" rIns="0" bIns="0" rtlCol="0" anchor="ctr"/>
           <a:lstStyle/>
           <a:p>
-            <a:pPr indent="0" marL="0">
+            <a:pPr marL="0" indent="0">
               <a:buNone/>
             </a:pPr>
             <a:r>
@@ -4322,7 +4189,7 @@
           <a:bodyPr wrap="square" lIns="0" tIns="0" rIns="0" bIns="0" rtlCol="0" anchor="ctr"/>
           <a:lstStyle/>
           <a:p>
-            <a:pPr indent="0" marL="0">
+            <a:pPr marL="0" indent="0">
               <a:lnSpc>
                 <a:spcPct val="130000"/>
               </a:lnSpc>
@@ -4362,6 +4229,13 @@
           </a:solidFill>
           <a:ln/>
         </p:spPr>
+        <p:txBody>
+          <a:bodyPr/>
+          <a:lstStyle/>
+          <a:p>
+            <a:endParaRPr lang="en-US"/>
+          </a:p>
+        </p:txBody>
       </p:sp>
       <p:sp>
         <p:nvSpPr>
@@ -4384,7 +4258,7 @@
           <a:bodyPr wrap="square" lIns="0" tIns="0" rIns="0" bIns="0" rtlCol="0" anchor="ctr"/>
           <a:lstStyle/>
           <a:p>
-            <a:pPr algn="ctr" indent="0" marL="0">
+            <a:pPr marL="0" indent="0" algn="ctr">
               <a:buNone/>
             </a:pPr>
             <a:r>
@@ -4423,7 +4297,7 @@
           <a:bodyPr wrap="square" lIns="0" tIns="0" rIns="0" bIns="0" rtlCol="0" anchor="ctr"/>
           <a:lstStyle/>
           <a:p>
-            <a:pPr indent="0" marL="0">
+            <a:pPr marL="0" indent="0">
               <a:buNone/>
             </a:pPr>
             <a:r>
@@ -4462,7 +4336,7 @@
           <a:bodyPr wrap="square" lIns="0" tIns="0" rIns="0" bIns="0" rtlCol="0" anchor="ctr"/>
           <a:lstStyle/>
           <a:p>
-            <a:pPr indent="0" marL="0">
+            <a:pPr marL="0" indent="0">
               <a:lnSpc>
                 <a:spcPct val="130000"/>
               </a:lnSpc>
@@ -4504,7 +4378,7 @@
           <a:bodyPr wrap="square" lIns="0" tIns="0" rIns="0" bIns="0" rtlCol="0" anchor="ctr"/>
           <a:lstStyle/>
           <a:p>
-            <a:pPr algn="r" indent="0" marL="0">
+            <a:pPr marL="0" indent="0" algn="r">
               <a:buNone/>
             </a:pPr>
             <a:r>
@@ -4518,9 +4392,6 @@
               </a:rPr>
               <a:t>veroax</a:t>
             </a:r>
-            <a:pPr algn="r" indent="0" marL="0">
-              <a:buNone/>
-            </a:pPr>
             <a:r>
               <a:rPr lang="en-US" sz="1200" b="1" dirty="0">
                 <a:solidFill>
@@ -4552,6 +4423,7 @@
         <a:solidFill>
           <a:srgbClr val="1E1B4B"/>
         </a:solidFill>
+        <a:effectLst/>
       </p:bgPr>
     </p:bg>
     <p:spTree>
@@ -4589,11 +4461,11 @@
           <a:bodyPr wrap="square" lIns="0" tIns="0" rIns="0" bIns="0" rtlCol="0" anchor="ctr"/>
           <a:lstStyle/>
           <a:p>
-            <a:pPr indent="0" marL="0">
-              <a:buNone/>
-            </a:pPr>
-            <a:r>
-              <a:rPr lang="en-US" sz="900" b="1" spc="400" kern="0" dirty="0">
+            <a:pPr marL="0" indent="0">
+              <a:buNone/>
+            </a:pPr>
+            <a:r>
+              <a:rPr lang="en-US" sz="900" b="1" kern="0" spc="400" dirty="0">
                 <a:solidFill>
                   <a:srgbClr val="CBD5E1"/>
                 </a:solidFill>
@@ -4628,7 +4500,7 @@
           <a:bodyPr wrap="square" lIns="0" tIns="0" rIns="0" bIns="0" rtlCol="0" anchor="ctr"/>
           <a:lstStyle/>
           <a:p>
-            <a:pPr indent="0" marL="0">
+            <a:pPr marL="0" indent="0">
               <a:buNone/>
             </a:pPr>
             <a:r>
@@ -4667,7 +4539,7 @@
           <a:bodyPr wrap="square" lIns="0" tIns="0" rIns="0" bIns="0" rtlCol="0" anchor="ctr"/>
           <a:lstStyle/>
           <a:p>
-            <a:pPr indent="0" marL="0">
+            <a:pPr marL="0" indent="0">
               <a:buNone/>
             </a:pPr>
             <a:r>
@@ -4709,6 +4581,13 @@
             <a:prstDash val="solid"/>
           </a:ln>
         </p:spPr>
+        <p:txBody>
+          <a:bodyPr/>
+          <a:lstStyle/>
+          <a:p>
+            <a:endParaRPr lang="en-US"/>
+          </a:p>
+        </p:txBody>
       </p:sp>
       <p:sp>
         <p:nvSpPr>
@@ -4731,7 +4610,7 @@
           <a:bodyPr wrap="square" lIns="0" tIns="0" rIns="0" bIns="0" rtlCol="0" anchor="ctr"/>
           <a:lstStyle/>
           <a:p>
-            <a:pPr indent="0" marL="0">
+            <a:pPr marL="0" indent="0">
               <a:buNone/>
             </a:pPr>
             <a:r>
@@ -4770,7 +4649,7 @@
           <a:bodyPr wrap="square" lIns="0" tIns="0" rIns="0" bIns="0" rtlCol="0" anchor="ctr"/>
           <a:lstStyle/>
           <a:p>
-            <a:pPr indent="0" marL="0">
+            <a:pPr marL="0" indent="0">
               <a:lnSpc>
                 <a:spcPct val="130000"/>
               </a:lnSpc>
@@ -4815,6 +4694,13 @@
             <a:prstDash val="solid"/>
           </a:ln>
         </p:spPr>
+        <p:txBody>
+          <a:bodyPr/>
+          <a:lstStyle/>
+          <a:p>
+            <a:endParaRPr lang="en-US"/>
+          </a:p>
+        </p:txBody>
       </p:sp>
       <p:sp>
         <p:nvSpPr>
@@ -4837,7 +4723,7 @@
           <a:bodyPr wrap="square" lIns="0" tIns="0" rIns="0" bIns="0" rtlCol="0" anchor="ctr"/>
           <a:lstStyle/>
           <a:p>
-            <a:pPr indent="0" marL="0">
+            <a:pPr marL="0" indent="0">
               <a:buNone/>
             </a:pPr>
             <a:r>
@@ -4876,7 +4762,7 @@
           <a:bodyPr wrap="square" lIns="0" tIns="0" rIns="0" bIns="0" rtlCol="0" anchor="ctr"/>
           <a:lstStyle/>
           <a:p>
-            <a:pPr indent="0" marL="0">
+            <a:pPr marL="0" indent="0">
               <a:lnSpc>
                 <a:spcPct val="130000"/>
               </a:lnSpc>
@@ -4921,6 +4807,13 @@
             <a:prstDash val="solid"/>
           </a:ln>
         </p:spPr>
+        <p:txBody>
+          <a:bodyPr/>
+          <a:lstStyle/>
+          <a:p>
+            <a:endParaRPr lang="en-US"/>
+          </a:p>
+        </p:txBody>
       </p:sp>
       <p:sp>
         <p:nvSpPr>
@@ -4943,7 +4836,7 @@
           <a:bodyPr wrap="square" lIns="0" tIns="0" rIns="0" bIns="0" rtlCol="0" anchor="ctr"/>
           <a:lstStyle/>
           <a:p>
-            <a:pPr indent="0" marL="0">
+            <a:pPr marL="0" indent="0">
               <a:buNone/>
             </a:pPr>
             <a:r>
@@ -4982,7 +4875,7 @@
           <a:bodyPr wrap="square" lIns="0" tIns="0" rIns="0" bIns="0" rtlCol="0" anchor="ctr"/>
           <a:lstStyle/>
           <a:p>
-            <a:pPr indent="0" marL="0">
+            <a:pPr marL="0" indent="0">
               <a:lnSpc>
                 <a:spcPct val="130000"/>
               </a:lnSpc>
@@ -5024,11 +4917,11 @@
           <a:bodyPr wrap="square" lIns="0" tIns="0" rIns="0" bIns="0" rtlCol="0" anchor="ctr"/>
           <a:lstStyle/>
           <a:p>
-            <a:pPr indent="0" marL="0">
-              <a:buNone/>
-            </a:pPr>
-            <a:r>
-              <a:rPr lang="en-US" sz="1100" b="1" spc="400" kern="0" dirty="0">
+            <a:pPr marL="0" indent="0">
+              <a:buNone/>
+            </a:pPr>
+            <a:r>
+              <a:rPr lang="en-US" sz="1100" b="1" kern="0" spc="400" dirty="0">
                 <a:solidFill>
                   <a:srgbClr val="FCD34D"/>
                 </a:solidFill>
@@ -5068,6 +4961,13 @@
             <a:prstDash val="solid"/>
           </a:ln>
         </p:spPr>
+        <p:txBody>
+          <a:bodyPr/>
+          <a:lstStyle/>
+          <a:p>
+            <a:endParaRPr lang="en-US"/>
+          </a:p>
+        </p:txBody>
       </p:sp>
       <p:sp>
         <p:nvSpPr>
@@ -5090,7 +4990,7 @@
           <a:bodyPr wrap="square" lIns="0" tIns="0" rIns="0" bIns="0" rtlCol="0" anchor="ctr"/>
           <a:lstStyle/>
           <a:p>
-            <a:pPr indent="0" marL="0">
+            <a:pPr marL="0" indent="0">
               <a:buNone/>
             </a:pPr>
             <a:r>
@@ -5129,7 +5029,7 @@
           <a:bodyPr wrap="square" lIns="0" tIns="0" rIns="0" bIns="0" rtlCol="0" anchor="ctr"/>
           <a:lstStyle/>
           <a:p>
-            <a:pPr indent="0" marL="0">
+            <a:pPr marL="0" indent="0">
               <a:buNone/>
             </a:pPr>
             <a:r>
@@ -5173,6 +5073,13 @@
             <a:prstDash val="solid"/>
           </a:ln>
         </p:spPr>
+        <p:txBody>
+          <a:bodyPr/>
+          <a:lstStyle/>
+          <a:p>
+            <a:endParaRPr lang="en-US"/>
+          </a:p>
+        </p:txBody>
       </p:sp>
       <p:sp>
         <p:nvSpPr>
@@ -5195,7 +5102,7 @@
           <a:bodyPr wrap="square" lIns="0" tIns="0" rIns="0" bIns="0" rtlCol="0" anchor="ctr"/>
           <a:lstStyle/>
           <a:p>
-            <a:pPr indent="0" marL="0">
+            <a:pPr marL="0" indent="0">
               <a:buNone/>
             </a:pPr>
             <a:r>
@@ -5234,7 +5141,7 @@
           <a:bodyPr wrap="square" lIns="0" tIns="0" rIns="0" bIns="0" rtlCol="0" anchor="ctr"/>
           <a:lstStyle/>
           <a:p>
-            <a:pPr indent="0" marL="0">
+            <a:pPr marL="0" indent="0">
               <a:buNone/>
             </a:pPr>
             <a:r>
@@ -5278,6 +5185,13 @@
             <a:prstDash val="solid"/>
           </a:ln>
         </p:spPr>
+        <p:txBody>
+          <a:bodyPr/>
+          <a:lstStyle/>
+          <a:p>
+            <a:endParaRPr lang="en-US"/>
+          </a:p>
+        </p:txBody>
       </p:sp>
       <p:sp>
         <p:nvSpPr>
@@ -5300,7 +5214,7 @@
           <a:bodyPr wrap="square" lIns="0" tIns="0" rIns="0" bIns="0" rtlCol="0" anchor="ctr"/>
           <a:lstStyle/>
           <a:p>
-            <a:pPr indent="0" marL="0">
+            <a:pPr marL="0" indent="0">
               <a:buNone/>
             </a:pPr>
             <a:r>
@@ -5339,7 +5253,7 @@
           <a:bodyPr wrap="square" lIns="0" tIns="0" rIns="0" bIns="0" rtlCol="0" anchor="ctr"/>
           <a:lstStyle/>
           <a:p>
-            <a:pPr indent="0" marL="0">
+            <a:pPr marL="0" indent="0">
               <a:buNone/>
             </a:pPr>
             <a:r>
@@ -5383,6 +5297,13 @@
             <a:prstDash val="solid"/>
           </a:ln>
         </p:spPr>
+        <p:txBody>
+          <a:bodyPr/>
+          <a:lstStyle/>
+          <a:p>
+            <a:endParaRPr lang="en-US"/>
+          </a:p>
+        </p:txBody>
       </p:sp>
       <p:sp>
         <p:nvSpPr>
@@ -5405,7 +5326,7 @@
           <a:bodyPr wrap="square" lIns="0" tIns="0" rIns="0" bIns="0" rtlCol="0" anchor="ctr"/>
           <a:lstStyle/>
           <a:p>
-            <a:pPr indent="0" marL="0">
+            <a:pPr marL="0" indent="0">
               <a:buNone/>
             </a:pPr>
             <a:r>
@@ -5444,7 +5365,7 @@
           <a:bodyPr wrap="square" lIns="0" tIns="0" rIns="0" bIns="0" rtlCol="0" anchor="ctr"/>
           <a:lstStyle/>
           <a:p>
-            <a:pPr indent="0" marL="0">
+            <a:pPr marL="0" indent="0">
               <a:buNone/>
             </a:pPr>
             <a:r>
@@ -5483,7 +5404,7 @@
           <a:bodyPr wrap="square" lIns="0" tIns="0" rIns="0" bIns="0" rtlCol="0" anchor="ctr"/>
           <a:lstStyle/>
           <a:p>
-            <a:pPr algn="r" indent="0" marL="0">
+            <a:pPr marL="0" indent="0" algn="r">
               <a:buNone/>
             </a:pPr>
             <a:r>
@@ -5497,9 +5418,6 @@
               </a:rPr>
               <a:t>veroax</a:t>
             </a:r>
-            <a:pPr algn="r" indent="0" marL="0">
-              <a:buNone/>
-            </a:pPr>
             <a:r>
               <a:rPr lang="en-US" sz="1200" b="1" dirty="0">
                 <a:solidFill>
@@ -5531,6 +5449,7 @@
         <a:solidFill>
           <a:srgbClr val="FFFFFF"/>
         </a:solidFill>
+        <a:effectLst/>
       </p:bgPr>
     </p:bg>
     <p:spTree>
@@ -5568,11 +5487,11 @@
           <a:bodyPr wrap="square" lIns="0" tIns="0" rIns="0" bIns="0" rtlCol="0" anchor="ctr"/>
           <a:lstStyle/>
           <a:p>
-            <a:pPr indent="0" marL="0">
-              <a:buNone/>
-            </a:pPr>
-            <a:r>
-              <a:rPr lang="en-US" sz="900" b="1" spc="400" kern="0" dirty="0">
+            <a:pPr marL="0" indent="0">
+              <a:buNone/>
+            </a:pPr>
+            <a:r>
+              <a:rPr lang="en-US" sz="900" b="1" kern="0" spc="400" dirty="0">
                 <a:solidFill>
                   <a:srgbClr val="64748B"/>
                 </a:solidFill>
@@ -5607,7 +5526,7 @@
           <a:bodyPr wrap="square" lIns="0" tIns="0" rIns="0" bIns="0" rtlCol="0" anchor="ctr"/>
           <a:lstStyle/>
           <a:p>
-            <a:pPr indent="0" marL="0">
+            <a:pPr marL="0" indent="0">
               <a:buNone/>
             </a:pPr>
             <a:r>
@@ -5646,7 +5565,7 @@
           <a:bodyPr wrap="square" lIns="0" tIns="0" rIns="0" bIns="0" rtlCol="0" anchor="ctr"/>
           <a:lstStyle/>
           <a:p>
-            <a:pPr indent="0" marL="0">
+            <a:pPr marL="0" indent="0">
               <a:buNone/>
             </a:pPr>
             <a:r>
@@ -5688,6 +5607,13 @@
             <a:prstDash val="solid"/>
           </a:ln>
         </p:spPr>
+        <p:txBody>
+          <a:bodyPr/>
+          <a:lstStyle/>
+          <a:p>
+            <a:endParaRPr lang="en-US"/>
+          </a:p>
+        </p:txBody>
       </p:sp>
       <p:sp>
         <p:nvSpPr>
@@ -5710,7 +5636,7 @@
           <a:bodyPr wrap="square" lIns="0" tIns="0" rIns="0" bIns="0" rtlCol="0" anchor="ctr"/>
           <a:lstStyle/>
           <a:p>
-            <a:pPr indent="0" marL="0">
+            <a:pPr marL="0" indent="0">
               <a:buNone/>
             </a:pPr>
             <a:r>
@@ -5749,7 +5675,7 @@
           <a:bodyPr wrap="square" lIns="0" tIns="0" rIns="0" bIns="0" rtlCol="0" anchor="ctr"/>
           <a:lstStyle/>
           <a:p>
-            <a:pPr indent="0" marL="0">
+            <a:pPr marL="0" indent="0">
               <a:buNone/>
             </a:pPr>
             <a:r>
@@ -5788,7 +5714,7 @@
           <a:bodyPr wrap="square" lIns="0" tIns="0" rIns="0" bIns="0" rtlCol="0" anchor="ctr"/>
           <a:lstStyle/>
           <a:p>
-            <a:pPr indent="0" marL="0">
+            <a:pPr marL="0" indent="0">
               <a:lnSpc>
                 <a:spcPct val="125000"/>
               </a:lnSpc>
@@ -5833,6 +5759,13 @@
             <a:prstDash val="solid"/>
           </a:ln>
         </p:spPr>
+        <p:txBody>
+          <a:bodyPr/>
+          <a:lstStyle/>
+          <a:p>
+            <a:endParaRPr lang="en-US"/>
+          </a:p>
+        </p:txBody>
       </p:sp>
       <p:sp>
         <p:nvSpPr>
@@ -5855,7 +5788,7 @@
           <a:bodyPr wrap="square" lIns="0" tIns="0" rIns="0" bIns="0" rtlCol="0" anchor="ctr"/>
           <a:lstStyle/>
           <a:p>
-            <a:pPr indent="0" marL="0">
+            <a:pPr marL="0" indent="0">
               <a:buNone/>
             </a:pPr>
             <a:r>
@@ -5894,7 +5827,7 @@
           <a:bodyPr wrap="square" lIns="0" tIns="0" rIns="0" bIns="0" rtlCol="0" anchor="ctr"/>
           <a:lstStyle/>
           <a:p>
-            <a:pPr indent="0" marL="0">
+            <a:pPr marL="0" indent="0">
               <a:buNone/>
             </a:pPr>
             <a:r>
@@ -5933,7 +5866,7 @@
           <a:bodyPr wrap="square" lIns="0" tIns="0" rIns="0" bIns="0" rtlCol="0" anchor="ctr"/>
           <a:lstStyle/>
           <a:p>
-            <a:pPr indent="0" marL="0">
+            <a:pPr marL="0" indent="0">
               <a:lnSpc>
                 <a:spcPct val="125000"/>
               </a:lnSpc>
@@ -5978,6 +5911,13 @@
             <a:prstDash val="solid"/>
           </a:ln>
         </p:spPr>
+        <p:txBody>
+          <a:bodyPr/>
+          <a:lstStyle/>
+          <a:p>
+            <a:endParaRPr lang="en-US"/>
+          </a:p>
+        </p:txBody>
       </p:sp>
       <p:sp>
         <p:nvSpPr>
@@ -6000,7 +5940,7 @@
           <a:bodyPr wrap="square" lIns="0" tIns="0" rIns="0" bIns="0" rtlCol="0" anchor="ctr"/>
           <a:lstStyle/>
           <a:p>
-            <a:pPr indent="0" marL="0">
+            <a:pPr marL="0" indent="0">
               <a:buNone/>
             </a:pPr>
             <a:r>
@@ -6039,7 +5979,7 @@
           <a:bodyPr wrap="square" lIns="0" tIns="0" rIns="0" bIns="0" rtlCol="0" anchor="ctr"/>
           <a:lstStyle/>
           <a:p>
-            <a:pPr indent="0" marL="0">
+            <a:pPr marL="0" indent="0">
               <a:buNone/>
             </a:pPr>
             <a:r>
@@ -6078,7 +6018,7 @@
           <a:bodyPr wrap="square" lIns="0" tIns="0" rIns="0" bIns="0" rtlCol="0" anchor="ctr"/>
           <a:lstStyle/>
           <a:p>
-            <a:pPr indent="0" marL="0">
+            <a:pPr marL="0" indent="0">
               <a:lnSpc>
                 <a:spcPct val="125000"/>
               </a:lnSpc>
@@ -6123,6 +6063,13 @@
             <a:prstDash val="solid"/>
           </a:ln>
         </p:spPr>
+        <p:txBody>
+          <a:bodyPr/>
+          <a:lstStyle/>
+          <a:p>
+            <a:endParaRPr lang="en-US"/>
+          </a:p>
+        </p:txBody>
       </p:sp>
       <p:sp>
         <p:nvSpPr>
@@ -6145,7 +6092,7 @@
           <a:bodyPr wrap="square" lIns="0" tIns="0" rIns="0" bIns="0" rtlCol="0" anchor="ctr"/>
           <a:lstStyle/>
           <a:p>
-            <a:pPr indent="0" marL="0">
+            <a:pPr marL="0" indent="0">
               <a:buNone/>
             </a:pPr>
             <a:r>
@@ -6184,7 +6131,7 @@
           <a:bodyPr wrap="square" lIns="0" tIns="0" rIns="0" bIns="0" rtlCol="0" anchor="ctr"/>
           <a:lstStyle/>
           <a:p>
-            <a:pPr indent="0" marL="0">
+            <a:pPr marL="0" indent="0">
               <a:buNone/>
             </a:pPr>
             <a:r>
@@ -6223,7 +6170,7 @@
           <a:bodyPr wrap="square" lIns="0" tIns="0" rIns="0" bIns="0" rtlCol="0" anchor="ctr"/>
           <a:lstStyle/>
           <a:p>
-            <a:pPr indent="0" marL="0">
+            <a:pPr marL="0" indent="0">
               <a:lnSpc>
                 <a:spcPct val="125000"/>
               </a:lnSpc>
@@ -6263,6 +6210,13 @@
           </a:solidFill>
           <a:ln/>
         </p:spPr>
+        <p:txBody>
+          <a:bodyPr/>
+          <a:lstStyle/>
+          <a:p>
+            <a:endParaRPr lang="en-US"/>
+          </a:p>
+        </p:txBody>
       </p:sp>
       <p:sp>
         <p:nvSpPr>
@@ -6285,11 +6239,11 @@
           <a:bodyPr wrap="square" lIns="0" tIns="0" rIns="0" bIns="0" rtlCol="0" anchor="ctr"/>
           <a:lstStyle/>
           <a:p>
-            <a:pPr indent="0" marL="0">
-              <a:buNone/>
-            </a:pPr>
-            <a:r>
-              <a:rPr lang="en-US" sz="1200" b="1" spc="400" kern="0" dirty="0">
+            <a:pPr marL="0" indent="0">
+              <a:buNone/>
+            </a:pPr>
+            <a:r>
+              <a:rPr lang="en-US" sz="1200" b="1" kern="0" spc="400" dirty="0">
                 <a:solidFill>
                   <a:srgbClr val="FCD34D"/>
                 </a:solidFill>
@@ -6324,7 +6278,7 @@
           <a:bodyPr wrap="square" lIns="0" tIns="0" rIns="0" bIns="0" rtlCol="0" anchor="ctr"/>
           <a:lstStyle/>
           <a:p>
-            <a:pPr indent="0" marL="0">
+            <a:pPr marL="0" indent="0">
               <a:buNone/>
             </a:pPr>
             <a:r>
@@ -6363,7 +6317,7 @@
           <a:bodyPr wrap="square" lIns="0" tIns="0" rIns="0" bIns="0" rtlCol="0" anchor="ctr"/>
           <a:lstStyle/>
           <a:p>
-            <a:pPr indent="0" marL="0">
+            <a:pPr marL="0" indent="0">
               <a:buNone/>
             </a:pPr>
             <a:r>
@@ -6402,7 +6356,7 @@
           <a:bodyPr wrap="square" lIns="0" tIns="0" rIns="0" bIns="0" rtlCol="0" anchor="ctr"/>
           <a:lstStyle/>
           <a:p>
-            <a:pPr indent="0" marL="0">
+            <a:pPr marL="0" indent="0">
               <a:buNone/>
             </a:pPr>
             <a:r>
@@ -6441,7 +6395,7 @@
           <a:bodyPr wrap="square" lIns="0" tIns="0" rIns="0" bIns="0" rtlCol="0" anchor="ctr"/>
           <a:lstStyle/>
           <a:p>
-            <a:pPr indent="0" marL="0">
+            <a:pPr marL="0" indent="0">
               <a:buNone/>
             </a:pPr>
             <a:r>
@@ -6480,7 +6434,7 @@
           <a:bodyPr wrap="square" lIns="0" tIns="0" rIns="0" bIns="0" rtlCol="0" anchor="ctr"/>
           <a:lstStyle/>
           <a:p>
-            <a:pPr indent="0" marL="0">
+            <a:pPr marL="0" indent="0">
               <a:buNone/>
             </a:pPr>
             <a:r>
@@ -6519,7 +6473,7 @@
           <a:bodyPr wrap="square" lIns="0" tIns="0" rIns="0" bIns="0" rtlCol="0" anchor="ctr"/>
           <a:lstStyle/>
           <a:p>
-            <a:pPr indent="0" marL="0">
+            <a:pPr marL="0" indent="0">
               <a:buNone/>
             </a:pPr>
             <a:r>
@@ -6558,7 +6512,7 @@
           <a:bodyPr wrap="square" lIns="0" tIns="0" rIns="0" bIns="0" rtlCol="0" anchor="ctr"/>
           <a:lstStyle/>
           <a:p>
-            <a:pPr indent="0" marL="0">
+            <a:pPr marL="0" indent="0">
               <a:buNone/>
             </a:pPr>
             <a:r>
@@ -6597,7 +6551,7 @@
           <a:bodyPr wrap="square" lIns="0" tIns="0" rIns="0" bIns="0" rtlCol="0" anchor="ctr"/>
           <a:lstStyle/>
           <a:p>
-            <a:pPr indent="0" marL="0">
+            <a:pPr marL="0" indent="0">
               <a:buNone/>
             </a:pPr>
             <a:r>
@@ -6636,7 +6590,7 @@
           <a:bodyPr wrap="square" lIns="0" tIns="0" rIns="0" bIns="0" rtlCol="0" anchor="ctr"/>
           <a:lstStyle/>
           <a:p>
-            <a:pPr algn="r" indent="0" marL="0">
+            <a:pPr marL="0" indent="0" algn="r">
               <a:buNone/>
             </a:pPr>
             <a:r>
@@ -6650,9 +6604,6 @@
               </a:rPr>
               <a:t>veroax</a:t>
             </a:r>
-            <a:pPr algn="r" indent="0" marL="0">
-              <a:buNone/>
-            </a:pPr>
             <a:r>
               <a:rPr lang="en-US" sz="1200" b="1" dirty="0">
                 <a:solidFill>
@@ -6684,6 +6635,7 @@
         <a:solidFill>
           <a:srgbClr val="FAF8F2"/>
         </a:solidFill>
+        <a:effectLst/>
       </p:bgPr>
     </p:bg>
     <p:spTree>
@@ -6721,11 +6673,11 @@
           <a:bodyPr wrap="square" lIns="0" tIns="0" rIns="0" bIns="0" rtlCol="0" anchor="ctr"/>
           <a:lstStyle/>
           <a:p>
-            <a:pPr indent="0" marL="0">
-              <a:buNone/>
-            </a:pPr>
-            <a:r>
-              <a:rPr lang="en-US" sz="900" b="1" spc="400" kern="0" dirty="0">
+            <a:pPr marL="0" indent="0">
+              <a:buNone/>
+            </a:pPr>
+            <a:r>
+              <a:rPr lang="en-US" sz="900" b="1" kern="0" spc="400" dirty="0">
                 <a:solidFill>
                   <a:srgbClr val="64748B"/>
                 </a:solidFill>
@@ -6760,7 +6712,7 @@
           <a:bodyPr wrap="square" lIns="0" tIns="0" rIns="0" bIns="0" rtlCol="0" anchor="ctr"/>
           <a:lstStyle/>
           <a:p>
-            <a:pPr indent="0" marL="0">
+            <a:pPr marL="0" indent="0">
               <a:buNone/>
             </a:pPr>
             <a:r>
@@ -6799,7 +6751,7 @@
           <a:bodyPr wrap="square" lIns="0" tIns="0" rIns="0" bIns="0" rtlCol="0" anchor="ctr"/>
           <a:lstStyle/>
           <a:p>
-            <a:pPr indent="0" marL="0">
+            <a:pPr marL="0" indent="0">
               <a:buNone/>
             </a:pPr>
             <a:r>
@@ -6836,6 +6788,13 @@
           </a:solidFill>
           <a:ln/>
         </p:spPr>
+        <p:txBody>
+          <a:bodyPr/>
+          <a:lstStyle/>
+          <a:p>
+            <a:endParaRPr lang="en-US"/>
+          </a:p>
+        </p:txBody>
       </p:sp>
       <p:sp>
         <p:nvSpPr>
@@ -6858,7 +6817,7 @@
           <a:bodyPr wrap="square" lIns="0" tIns="0" rIns="0" bIns="0" rtlCol="0" anchor="ctr"/>
           <a:lstStyle/>
           <a:p>
-            <a:pPr algn="ctr" indent="0" marL="0">
+            <a:pPr marL="0" indent="0" algn="ctr">
               <a:buNone/>
             </a:pPr>
             <a:r>
@@ -6897,7 +6856,7 @@
           <a:bodyPr wrap="square" lIns="0" tIns="0" rIns="0" bIns="0" rtlCol="0" anchor="ctr"/>
           <a:lstStyle/>
           <a:p>
-            <a:pPr indent="0" marL="0">
+            <a:pPr marL="0" indent="0">
               <a:buNone/>
             </a:pPr>
             <a:r>
@@ -6936,7 +6895,7 @@
           <a:bodyPr wrap="square" lIns="0" tIns="0" rIns="0" bIns="0" rtlCol="0" anchor="ctr"/>
           <a:lstStyle/>
           <a:p>
-            <a:pPr indent="0" marL="0">
+            <a:pPr marL="0" indent="0">
               <a:lnSpc>
                 <a:spcPct val="130000"/>
               </a:lnSpc>
@@ -6976,6 +6935,13 @@
           </a:solidFill>
           <a:ln/>
         </p:spPr>
+        <p:txBody>
+          <a:bodyPr/>
+          <a:lstStyle/>
+          <a:p>
+            <a:endParaRPr lang="en-US"/>
+          </a:p>
+        </p:txBody>
       </p:sp>
       <p:sp>
         <p:nvSpPr>
@@ -6998,7 +6964,7 @@
           <a:bodyPr wrap="square" lIns="0" tIns="0" rIns="0" bIns="0" rtlCol="0" anchor="ctr"/>
           <a:lstStyle/>
           <a:p>
-            <a:pPr algn="ctr" indent="0" marL="0">
+            <a:pPr marL="0" indent="0" algn="ctr">
               <a:buNone/>
             </a:pPr>
             <a:r>
@@ -7037,7 +7003,7 @@
           <a:bodyPr wrap="square" lIns="0" tIns="0" rIns="0" bIns="0" rtlCol="0" anchor="ctr"/>
           <a:lstStyle/>
           <a:p>
-            <a:pPr indent="0" marL="0">
+            <a:pPr marL="0" indent="0">
               <a:buNone/>
             </a:pPr>
             <a:r>
@@ -7076,7 +7042,7 @@
           <a:bodyPr wrap="square" lIns="0" tIns="0" rIns="0" bIns="0" rtlCol="0" anchor="ctr"/>
           <a:lstStyle/>
           <a:p>
-            <a:pPr indent="0" marL="0">
+            <a:pPr marL="0" indent="0">
               <a:lnSpc>
                 <a:spcPct val="130000"/>
               </a:lnSpc>
@@ -7116,6 +7082,13 @@
           </a:solidFill>
           <a:ln/>
         </p:spPr>
+        <p:txBody>
+          <a:bodyPr/>
+          <a:lstStyle/>
+          <a:p>
+            <a:endParaRPr lang="en-US"/>
+          </a:p>
+        </p:txBody>
       </p:sp>
       <p:sp>
         <p:nvSpPr>
@@ -7138,7 +7111,7 @@
           <a:bodyPr wrap="square" lIns="0" tIns="0" rIns="0" bIns="0" rtlCol="0" anchor="ctr"/>
           <a:lstStyle/>
           <a:p>
-            <a:pPr algn="ctr" indent="0" marL="0">
+            <a:pPr marL="0" indent="0" algn="ctr">
               <a:buNone/>
             </a:pPr>
             <a:r>
@@ -7177,7 +7150,7 @@
           <a:bodyPr wrap="square" lIns="0" tIns="0" rIns="0" bIns="0" rtlCol="0" anchor="ctr"/>
           <a:lstStyle/>
           <a:p>
-            <a:pPr indent="0" marL="0">
+            <a:pPr marL="0" indent="0">
               <a:buNone/>
             </a:pPr>
             <a:r>
@@ -7216,7 +7189,7 @@
           <a:bodyPr wrap="square" lIns="0" tIns="0" rIns="0" bIns="0" rtlCol="0" anchor="ctr"/>
           <a:lstStyle/>
           <a:p>
-            <a:pPr indent="0" marL="0">
+            <a:pPr marL="0" indent="0">
               <a:lnSpc>
                 <a:spcPct val="130000"/>
               </a:lnSpc>
@@ -7258,7 +7231,7 @@
           <a:bodyPr wrap="square" lIns="0" tIns="0" rIns="0" bIns="0" rtlCol="0" anchor="ctr"/>
           <a:lstStyle/>
           <a:p>
-            <a:pPr algn="r" indent="0" marL="0">
+            <a:pPr marL="0" indent="0" algn="r">
               <a:buNone/>
             </a:pPr>
             <a:r>
@@ -7272,9 +7245,6 @@
               </a:rPr>
               <a:t>veroax</a:t>
             </a:r>
-            <a:pPr algn="r" indent="0" marL="0">
-              <a:buNone/>
-            </a:pPr>
             <a:r>
               <a:rPr lang="en-US" sz="1200" b="1" dirty="0">
                 <a:solidFill>
@@ -7306,6 +7276,7 @@
         <a:solidFill>
           <a:srgbClr val="FFFFFF"/>
         </a:solidFill>
+        <a:effectLst/>
       </p:bgPr>
     </p:bg>
     <p:spTree>
@@ -7343,11 +7314,11 @@
           <a:bodyPr wrap="square" lIns="0" tIns="0" rIns="0" bIns="0" rtlCol="0" anchor="ctr"/>
           <a:lstStyle/>
           <a:p>
-            <a:pPr indent="0" marL="0">
-              <a:buNone/>
-            </a:pPr>
-            <a:r>
-              <a:rPr lang="en-US" sz="900" b="1" spc="400" kern="0" dirty="0">
+            <a:pPr marL="0" indent="0">
+              <a:buNone/>
+            </a:pPr>
+            <a:r>
+              <a:rPr lang="en-US" sz="900" b="1" kern="0" spc="400" dirty="0">
                 <a:solidFill>
                   <a:srgbClr val="64748B"/>
                 </a:solidFill>
@@ -7382,7 +7353,7 @@
           <a:bodyPr wrap="square" lIns="0" tIns="0" rIns="0" bIns="0" rtlCol="0" anchor="ctr"/>
           <a:lstStyle/>
           <a:p>
-            <a:pPr indent="0" marL="0">
+            <a:pPr marL="0" indent="0">
               <a:buNone/>
             </a:pPr>
             <a:r>
@@ -7419,6 +7390,13 @@
           </a:solidFill>
           <a:ln/>
         </p:spPr>
+        <p:txBody>
+          <a:bodyPr/>
+          <a:lstStyle/>
+          <a:p>
+            <a:endParaRPr lang="en-US"/>
+          </a:p>
+        </p:txBody>
       </p:sp>
       <p:sp>
         <p:nvSpPr>
@@ -7439,6 +7417,13 @@
           </a:solidFill>
           <a:ln/>
         </p:spPr>
+        <p:txBody>
+          <a:bodyPr/>
+          <a:lstStyle/>
+          <a:p>
+            <a:endParaRPr lang="en-US"/>
+          </a:p>
+        </p:txBody>
       </p:sp>
       <p:sp>
         <p:nvSpPr>
@@ -7461,7 +7446,7 @@
           <a:bodyPr wrap="square" lIns="0" tIns="0" rIns="0" bIns="0" rtlCol="0" anchor="ctr"/>
           <a:lstStyle/>
           <a:p>
-            <a:pPr indent="0" marL="0">
+            <a:pPr marL="0" indent="0">
               <a:buNone/>
             </a:pPr>
             <a:r>
@@ -7500,7 +7485,7 @@
           <a:bodyPr wrap="square" lIns="0" tIns="0" rIns="0" bIns="0" rtlCol="0" anchor="ctr"/>
           <a:lstStyle/>
           <a:p>
-            <a:pPr indent="0" marL="0">
+            <a:pPr marL="0" indent="0">
               <a:lnSpc>
                 <a:spcPct val="135000"/>
               </a:lnSpc>
@@ -7540,6 +7525,13 @@
           </a:solidFill>
           <a:ln/>
         </p:spPr>
+        <p:txBody>
+          <a:bodyPr/>
+          <a:lstStyle/>
+          <a:p>
+            <a:endParaRPr lang="en-US"/>
+          </a:p>
+        </p:txBody>
       </p:sp>
       <p:sp>
         <p:nvSpPr>
@@ -7560,6 +7552,13 @@
           </a:solidFill>
           <a:ln/>
         </p:spPr>
+        <p:txBody>
+          <a:bodyPr/>
+          <a:lstStyle/>
+          <a:p>
+            <a:endParaRPr lang="en-US"/>
+          </a:p>
+        </p:txBody>
       </p:sp>
       <p:sp>
         <p:nvSpPr>
@@ -7582,7 +7581,7 @@
           <a:bodyPr wrap="square" lIns="0" tIns="0" rIns="0" bIns="0" rtlCol="0" anchor="ctr"/>
           <a:lstStyle/>
           <a:p>
-            <a:pPr indent="0" marL="0">
+            <a:pPr marL="0" indent="0">
               <a:buNone/>
             </a:pPr>
             <a:r>
@@ -7621,7 +7620,7 @@
           <a:bodyPr wrap="square" lIns="0" tIns="0" rIns="0" bIns="0" rtlCol="0" anchor="ctr"/>
           <a:lstStyle/>
           <a:p>
-            <a:pPr indent="0" marL="0">
+            <a:pPr marL="0" indent="0">
               <a:lnSpc>
                 <a:spcPct val="135000"/>
               </a:lnSpc>
@@ -7661,6 +7660,13 @@
           </a:solidFill>
           <a:ln/>
         </p:spPr>
+        <p:txBody>
+          <a:bodyPr/>
+          <a:lstStyle/>
+          <a:p>
+            <a:endParaRPr lang="en-US"/>
+          </a:p>
+        </p:txBody>
       </p:sp>
       <p:sp>
         <p:nvSpPr>
@@ -7681,6 +7687,13 @@
           </a:solidFill>
           <a:ln/>
         </p:spPr>
+        <p:txBody>
+          <a:bodyPr/>
+          <a:lstStyle/>
+          <a:p>
+            <a:endParaRPr lang="en-US"/>
+          </a:p>
+        </p:txBody>
       </p:sp>
       <p:sp>
         <p:nvSpPr>
@@ -7703,7 +7716,7 @@
           <a:bodyPr wrap="square" lIns="0" tIns="0" rIns="0" bIns="0" rtlCol="0" anchor="ctr"/>
           <a:lstStyle/>
           <a:p>
-            <a:pPr indent="0" marL="0">
+            <a:pPr marL="0" indent="0">
               <a:buNone/>
             </a:pPr>
             <a:r>
@@ -7742,7 +7755,7 @@
           <a:bodyPr wrap="square" lIns="0" tIns="0" rIns="0" bIns="0" rtlCol="0" anchor="ctr"/>
           <a:lstStyle/>
           <a:p>
-            <a:pPr indent="0" marL="0">
+            <a:pPr marL="0" indent="0">
               <a:lnSpc>
                 <a:spcPct val="135000"/>
               </a:lnSpc>
@@ -7782,6 +7795,13 @@
           </a:solidFill>
           <a:ln/>
         </p:spPr>
+        <p:txBody>
+          <a:bodyPr/>
+          <a:lstStyle/>
+          <a:p>
+            <a:endParaRPr lang="en-US"/>
+          </a:p>
+        </p:txBody>
       </p:sp>
       <p:sp>
         <p:nvSpPr>
@@ -7802,6 +7822,13 @@
           </a:solidFill>
           <a:ln/>
         </p:spPr>
+        <p:txBody>
+          <a:bodyPr/>
+          <a:lstStyle/>
+          <a:p>
+            <a:endParaRPr lang="en-US"/>
+          </a:p>
+        </p:txBody>
       </p:sp>
       <p:sp>
         <p:nvSpPr>
@@ -7824,7 +7851,7 @@
           <a:bodyPr wrap="square" lIns="0" tIns="0" rIns="0" bIns="0" rtlCol="0" anchor="ctr"/>
           <a:lstStyle/>
           <a:p>
-            <a:pPr indent="0" marL="0">
+            <a:pPr marL="0" indent="0">
               <a:buNone/>
             </a:pPr>
             <a:r>
@@ -7863,7 +7890,7 @@
           <a:bodyPr wrap="square" lIns="0" tIns="0" rIns="0" bIns="0" rtlCol="0" anchor="ctr"/>
           <a:lstStyle/>
           <a:p>
-            <a:pPr indent="0" marL="0">
+            <a:pPr marL="0" indent="0">
               <a:lnSpc>
                 <a:spcPct val="135000"/>
               </a:lnSpc>
@@ -7905,7 +7932,7 @@
           <a:bodyPr wrap="square" lIns="0" tIns="0" rIns="0" bIns="0" rtlCol="0" anchor="ctr"/>
           <a:lstStyle/>
           <a:p>
-            <a:pPr algn="r" indent="0" marL="0">
+            <a:pPr marL="0" indent="0" algn="r">
               <a:buNone/>
             </a:pPr>
             <a:r>
@@ -7919,9 +7946,6 @@
               </a:rPr>
               <a:t>veroax</a:t>
             </a:r>
-            <a:pPr algn="r" indent="0" marL="0">
-              <a:buNone/>
-            </a:pPr>
             <a:r>
               <a:rPr lang="en-US" sz="1200" b="1" dirty="0">
                 <a:solidFill>
@@ -7953,6 +7977,7 @@
         <a:solidFill>
           <a:srgbClr val="FFFFFF"/>
         </a:solidFill>
+        <a:effectLst/>
       </p:bgPr>
     </p:bg>
     <p:spTree>
@@ -7990,11 +8015,11 @@
           <a:bodyPr wrap="square" lIns="0" tIns="0" rIns="0" bIns="0" rtlCol="0" anchor="ctr"/>
           <a:lstStyle/>
           <a:p>
-            <a:pPr indent="0" marL="0">
-              <a:buNone/>
-            </a:pPr>
-            <a:r>
-              <a:rPr lang="en-US" sz="900" b="1" spc="400" kern="0" dirty="0">
+            <a:pPr marL="0" indent="0">
+              <a:buNone/>
+            </a:pPr>
+            <a:r>
+              <a:rPr lang="en-US" sz="900" b="1" kern="0" spc="400" dirty="0">
                 <a:solidFill>
                   <a:srgbClr val="64748B"/>
                 </a:solidFill>
@@ -8029,7 +8054,7 @@
           <a:bodyPr wrap="square" lIns="0" tIns="0" rIns="0" bIns="0" rtlCol="0" anchor="ctr"/>
           <a:lstStyle/>
           <a:p>
-            <a:pPr indent="0" marL="0">
+            <a:pPr marL="0" indent="0">
               <a:buNone/>
             </a:pPr>
             <a:r>
@@ -8071,6 +8096,13 @@
             <a:prstDash val="solid"/>
           </a:ln>
         </p:spPr>
+        <p:txBody>
+          <a:bodyPr/>
+          <a:lstStyle/>
+          <a:p>
+            <a:endParaRPr lang="en-US"/>
+          </a:p>
+        </p:txBody>
       </p:sp>
       <p:sp>
         <p:nvSpPr>
@@ -8093,11 +8125,11 @@
           <a:bodyPr wrap="square" lIns="0" tIns="0" rIns="0" bIns="0" rtlCol="0" anchor="ctr"/>
           <a:lstStyle/>
           <a:p>
-            <a:pPr indent="0" marL="0">
-              <a:buNone/>
-            </a:pPr>
-            <a:r>
-              <a:rPr lang="en-US" sz="1400" b="1" spc="300" kern="0" dirty="0">
+            <a:pPr marL="0" indent="0">
+              <a:buNone/>
+            </a:pPr>
+            <a:r>
+              <a:rPr lang="en-US" sz="1400" b="1" kern="0" spc="300" dirty="0">
                 <a:solidFill>
                   <a:srgbClr val="FFFFFF"/>
                 </a:solidFill>
@@ -8132,7 +8164,7 @@
           <a:bodyPr wrap="square" lIns="0" tIns="0" rIns="0" bIns="0" rtlCol="0" anchor="ctr"/>
           <a:lstStyle/>
           <a:p>
-            <a:pPr indent="0" marL="0">
+            <a:pPr marL="0" indent="0">
               <a:lnSpc>
                 <a:spcPct val="130000"/>
               </a:lnSpc>
@@ -8177,6 +8209,13 @@
             <a:prstDash val="solid"/>
           </a:ln>
         </p:spPr>
+        <p:txBody>
+          <a:bodyPr/>
+          <a:lstStyle/>
+          <a:p>
+            <a:endParaRPr lang="en-US"/>
+          </a:p>
+        </p:txBody>
       </p:sp>
       <p:sp>
         <p:nvSpPr>
@@ -8199,11 +8238,11 @@
           <a:bodyPr wrap="square" lIns="0" tIns="0" rIns="0" bIns="0" rtlCol="0" anchor="ctr"/>
           <a:lstStyle/>
           <a:p>
-            <a:pPr indent="0" marL="0">
-              <a:buNone/>
-            </a:pPr>
-            <a:r>
-              <a:rPr lang="en-US" sz="1400" b="1" spc="300" kern="0" dirty="0">
+            <a:pPr marL="0" indent="0">
+              <a:buNone/>
+            </a:pPr>
+            <a:r>
+              <a:rPr lang="en-US" sz="1400" b="1" kern="0" spc="300" dirty="0">
                 <a:solidFill>
                   <a:srgbClr val="E85D75"/>
                 </a:solidFill>
@@ -8238,7 +8277,7 @@
           <a:bodyPr wrap="square" lIns="0" tIns="0" rIns="0" bIns="0" rtlCol="0" anchor="ctr"/>
           <a:lstStyle/>
           <a:p>
-            <a:pPr indent="0" marL="0">
+            <a:pPr marL="0" indent="0">
               <a:lnSpc>
                 <a:spcPct val="130000"/>
               </a:lnSpc>
@@ -8283,6 +8322,13 @@
             <a:prstDash val="solid"/>
           </a:ln>
         </p:spPr>
+        <p:txBody>
+          <a:bodyPr/>
+          <a:lstStyle/>
+          <a:p>
+            <a:endParaRPr lang="en-US"/>
+          </a:p>
+        </p:txBody>
       </p:sp>
       <p:sp>
         <p:nvSpPr>
@@ -8305,11 +8351,11 @@
           <a:bodyPr wrap="square" lIns="0" tIns="0" rIns="0" bIns="0" rtlCol="0" anchor="ctr"/>
           <a:lstStyle/>
           <a:p>
-            <a:pPr indent="0" marL="0">
-              <a:buNone/>
-            </a:pPr>
-            <a:r>
-              <a:rPr lang="en-US" sz="1400" b="1" spc="300" kern="0" dirty="0">
+            <a:pPr marL="0" indent="0">
+              <a:buNone/>
+            </a:pPr>
+            <a:r>
+              <a:rPr lang="en-US" sz="1400" b="1" kern="0" spc="300" dirty="0">
                 <a:solidFill>
                   <a:srgbClr val="E85D75"/>
                 </a:solidFill>
@@ -8344,7 +8390,7 @@
           <a:bodyPr wrap="square" lIns="0" tIns="0" rIns="0" bIns="0" rtlCol="0" anchor="ctr"/>
           <a:lstStyle/>
           <a:p>
-            <a:pPr indent="0" marL="0">
+            <a:pPr marL="0" indent="0">
               <a:lnSpc>
                 <a:spcPct val="130000"/>
               </a:lnSpc>
@@ -8389,6 +8435,13 @@
             <a:prstDash val="solid"/>
           </a:ln>
         </p:spPr>
+        <p:txBody>
+          <a:bodyPr/>
+          <a:lstStyle/>
+          <a:p>
+            <a:endParaRPr lang="en-US"/>
+          </a:p>
+        </p:txBody>
       </p:sp>
       <p:sp>
         <p:nvSpPr>
@@ -8411,11 +8464,11 @@
           <a:bodyPr wrap="square" lIns="0" tIns="0" rIns="0" bIns="0" rtlCol="0" anchor="ctr"/>
           <a:lstStyle/>
           <a:p>
-            <a:pPr indent="0" marL="0">
-              <a:buNone/>
-            </a:pPr>
-            <a:r>
-              <a:rPr lang="en-US" sz="1400" b="1" spc="300" kern="0" dirty="0">
+            <a:pPr marL="0" indent="0">
+              <a:buNone/>
+            </a:pPr>
+            <a:r>
+              <a:rPr lang="en-US" sz="1400" b="1" kern="0" spc="300" dirty="0">
                 <a:solidFill>
                   <a:srgbClr val="E85D75"/>
                 </a:solidFill>
@@ -8450,7 +8503,7 @@
           <a:bodyPr wrap="square" lIns="0" tIns="0" rIns="0" bIns="0" rtlCol="0" anchor="ctr"/>
           <a:lstStyle/>
           <a:p>
-            <a:pPr indent="0" marL="0">
+            <a:pPr marL="0" indent="0">
               <a:lnSpc>
                 <a:spcPct val="130000"/>
               </a:lnSpc>
@@ -8492,11 +8545,11 @@
           <a:bodyPr wrap="square" lIns="0" tIns="0" rIns="0" bIns="0" rtlCol="0" anchor="ctr"/>
           <a:lstStyle/>
           <a:p>
-            <a:pPr indent="0" marL="0">
-              <a:buNone/>
-            </a:pPr>
-            <a:r>
-              <a:rPr lang="en-US" sz="1200" b="1" spc="400" kern="0" dirty="0">
+            <a:pPr marL="0" indent="0">
+              <a:buNone/>
+            </a:pPr>
+            <a:r>
+              <a:rPr lang="en-US" sz="1200" b="1" kern="0" spc="400" dirty="0">
                 <a:solidFill>
                   <a:srgbClr val="64748B"/>
                 </a:solidFill>
@@ -8529,6 +8582,13 @@
           </a:solidFill>
           <a:ln/>
         </p:spPr>
+        <p:txBody>
+          <a:bodyPr/>
+          <a:lstStyle/>
+          <a:p>
+            <a:endParaRPr lang="en-US"/>
+          </a:p>
+        </p:txBody>
       </p:sp>
       <p:sp>
         <p:nvSpPr>
@@ -8549,6 +8609,13 @@
           </a:solidFill>
           <a:ln/>
         </p:spPr>
+        <p:txBody>
+          <a:bodyPr/>
+          <a:lstStyle/>
+          <a:p>
+            <a:endParaRPr lang="en-US"/>
+          </a:p>
+        </p:txBody>
       </p:sp>
       <p:sp>
         <p:nvSpPr>
@@ -8569,6 +8636,13 @@
           </a:solidFill>
           <a:ln/>
         </p:spPr>
+        <p:txBody>
+          <a:bodyPr/>
+          <a:lstStyle/>
+          <a:p>
+            <a:endParaRPr lang="en-US"/>
+          </a:p>
+        </p:txBody>
       </p:sp>
       <p:sp>
         <p:nvSpPr>
@@ -8589,6 +8663,13 @@
           </a:solidFill>
           <a:ln/>
         </p:spPr>
+        <p:txBody>
+          <a:bodyPr/>
+          <a:lstStyle/>
+          <a:p>
+            <a:endParaRPr lang="en-US"/>
+          </a:p>
+        </p:txBody>
       </p:sp>
       <p:sp>
         <p:nvSpPr>
@@ -8609,6 +8690,13 @@
           </a:solidFill>
           <a:ln/>
         </p:spPr>
+        <p:txBody>
+          <a:bodyPr/>
+          <a:lstStyle/>
+          <a:p>
+            <a:endParaRPr lang="en-US"/>
+          </a:p>
+        </p:txBody>
       </p:sp>
       <p:sp>
         <p:nvSpPr>
@@ -8631,7 +8719,7 @@
           <a:bodyPr wrap="square" lIns="0" tIns="0" rIns="0" bIns="0" rtlCol="0" anchor="ctr"/>
           <a:lstStyle/>
           <a:p>
-            <a:pPr indent="0" marL="0">
+            <a:pPr marL="0" indent="0">
               <a:buNone/>
             </a:pPr>
             <a:r>
@@ -8668,6 +8756,13 @@
           </a:solidFill>
           <a:ln/>
         </p:spPr>
+        <p:txBody>
+          <a:bodyPr/>
+          <a:lstStyle/>
+          <a:p>
+            <a:endParaRPr lang="en-US"/>
+          </a:p>
+        </p:txBody>
       </p:sp>
       <p:sp>
         <p:nvSpPr>
@@ -8690,7 +8785,7 @@
           <a:bodyPr wrap="square" lIns="0" tIns="0" rIns="0" bIns="0" rtlCol="0" anchor="ctr"/>
           <a:lstStyle/>
           <a:p>
-            <a:pPr indent="0" marL="0">
+            <a:pPr marL="0" indent="0">
               <a:buNone/>
             </a:pPr>
             <a:r>
@@ -8727,6 +8822,13 @@
           </a:solidFill>
           <a:ln/>
         </p:spPr>
+        <p:txBody>
+          <a:bodyPr/>
+          <a:lstStyle/>
+          <a:p>
+            <a:endParaRPr lang="en-US"/>
+          </a:p>
+        </p:txBody>
       </p:sp>
       <p:sp>
         <p:nvSpPr>
@@ -8749,7 +8851,7 @@
           <a:bodyPr wrap="square" lIns="0" tIns="0" rIns="0" bIns="0" rtlCol="0" anchor="ctr"/>
           <a:lstStyle/>
           <a:p>
-            <a:pPr indent="0" marL="0">
+            <a:pPr marL="0" indent="0">
               <a:buNone/>
             </a:pPr>
             <a:r>
@@ -8786,6 +8888,13 @@
           </a:solidFill>
           <a:ln/>
         </p:spPr>
+        <p:txBody>
+          <a:bodyPr/>
+          <a:lstStyle/>
+          <a:p>
+            <a:endParaRPr lang="en-US"/>
+          </a:p>
+        </p:txBody>
       </p:sp>
       <p:sp>
         <p:nvSpPr>
@@ -8808,7 +8917,7 @@
           <a:bodyPr wrap="square" lIns="0" tIns="0" rIns="0" bIns="0" rtlCol="0" anchor="ctr"/>
           <a:lstStyle/>
           <a:p>
-            <a:pPr indent="0" marL="0">
+            <a:pPr marL="0" indent="0">
               <a:buNone/>
             </a:pPr>
             <a:r>
@@ -8847,7 +8956,7 @@
           <a:bodyPr wrap="square" lIns="0" tIns="0" rIns="0" bIns="0" rtlCol="0" anchor="ctr"/>
           <a:lstStyle/>
           <a:p>
-            <a:pPr algn="r" indent="0" marL="0">
+            <a:pPr marL="0" indent="0" algn="r">
               <a:buNone/>
             </a:pPr>
             <a:r>
@@ -8861,9 +8970,6 @@
               </a:rPr>
               <a:t>veroax</a:t>
             </a:r>
-            <a:pPr algn="r" indent="0" marL="0">
-              <a:buNone/>
-            </a:pPr>
             <a:r>
               <a:rPr lang="en-US" sz="1200" b="1" dirty="0">
                 <a:solidFill>
@@ -9180,4 +9286,319 @@
     </a:ext>
   </a:extLst>
 </a:theme>
+</file>
+
+<file path=ppt/theme/theme2.xml><?xml version="1.0" encoding="utf-8"?>
+<a:theme xmlns:a="http://schemas.openxmlformats.org/drawingml/2006/main" name="Office Theme">
+  <a:themeElements>
+    <a:clrScheme name="Office">
+      <a:dk1>
+        <a:sysClr val="windowText" lastClr="000000"/>
+      </a:dk1>
+      <a:lt1>
+        <a:sysClr val="window" lastClr="FFFFFF"/>
+      </a:lt1>
+      <a:dk2>
+        <a:srgbClr val="0E2841"/>
+      </a:dk2>
+      <a:lt2>
+        <a:srgbClr val="E8E8E8"/>
+      </a:lt2>
+      <a:accent1>
+        <a:srgbClr val="156082"/>
+      </a:accent1>
+      <a:accent2>
+        <a:srgbClr val="E97132"/>
+      </a:accent2>
+      <a:accent3>
+        <a:srgbClr val="196B24"/>
+      </a:accent3>
+      <a:accent4>
+        <a:srgbClr val="0F9ED5"/>
+      </a:accent4>
+      <a:accent5>
+        <a:srgbClr val="A02B93"/>
+      </a:accent5>
+      <a:accent6>
+        <a:srgbClr val="4EA72E"/>
+      </a:accent6>
+      <a:hlink>
+        <a:srgbClr val="467886"/>
+      </a:hlink>
+      <a:folHlink>
+        <a:srgbClr val="96607D"/>
+      </a:folHlink>
+    </a:clrScheme>
+    <a:fontScheme name="Office">
+      <a:majorFont>
+        <a:latin typeface="Aptos Display" panose="02110004020202020204"/>
+        <a:ea typeface=""/>
+        <a:cs typeface=""/>
+        <a:font script="Jpan" typeface="游ゴシック Light"/>
+        <a:font script="Hang" typeface="맑은 고딕"/>
+        <a:font script="Hans" typeface="等线 Light"/>
+        <a:font script="Hant" typeface="新細明體"/>
+        <a:font script="Arab" typeface="Times New Roman"/>
+        <a:font script="Hebr" typeface="Times New Roman"/>
+        <a:font script="Thai" typeface="Angsana New"/>
+        <a:font script="Ethi" typeface="Nyala"/>
+        <a:font script="Beng" typeface="Vrinda"/>
+        <a:font script="Gujr" typeface="Shruti"/>
+        <a:font script="Khmr" typeface="MoolBoran"/>
+        <a:font script="Knda" typeface="Tunga"/>
+        <a:font script="Guru" typeface="Raavi"/>
+        <a:font script="Cans" typeface="Euphemia"/>
+        <a:font script="Cher" typeface="Plantagenet Cherokee"/>
+        <a:font script="Yiii" typeface="Microsoft Yi Baiti"/>
+        <a:font script="Tibt" typeface="Microsoft Himalaya"/>
+        <a:font script="Thaa" typeface="MV Boli"/>
+        <a:font script="Deva" typeface="Mangal"/>
+        <a:font script="Telu" typeface="Gautami"/>
+        <a:font script="Taml" typeface="Latha"/>
+        <a:font script="Syrc" typeface="Estrangelo Edessa"/>
+        <a:font script="Orya" typeface="Kalinga"/>
+        <a:font script="Mlym" typeface="Kartika"/>
+        <a:font script="Laoo" typeface="DokChampa"/>
+        <a:font script="Sinh" typeface="Iskoola Pota"/>
+        <a:font script="Mong" typeface="Mongolian Baiti"/>
+        <a:font script="Viet" typeface="Times New Roman"/>
+        <a:font script="Uigh" typeface="Microsoft Uighur"/>
+        <a:font script="Geor" typeface="Sylfaen"/>
+        <a:font script="Armn" typeface="Arial"/>
+        <a:font script="Bugi" typeface="Leelawadee UI"/>
+        <a:font script="Bopo" typeface="Microsoft JhengHei"/>
+        <a:font script="Java" typeface="Javanese Text"/>
+        <a:font script="Lisu" typeface="Segoe UI"/>
+        <a:font script="Mymr" typeface="Myanmar Text"/>
+        <a:font script="Nkoo" typeface="Ebrima"/>
+        <a:font script="Olck" typeface="Nirmala UI"/>
+        <a:font script="Osma" typeface="Ebrima"/>
+        <a:font script="Phag" typeface="Phagspa"/>
+        <a:font script="Syrn" typeface="Estrangelo Edessa"/>
+        <a:font script="Syrj" typeface="Estrangelo Edessa"/>
+        <a:font script="Syre" typeface="Estrangelo Edessa"/>
+        <a:font script="Sora" typeface="Nirmala UI"/>
+        <a:font script="Tale" typeface="Microsoft Tai Le"/>
+        <a:font script="Talu" typeface="Microsoft New Tai Lue"/>
+        <a:font script="Tfng" typeface="Ebrima"/>
+      </a:majorFont>
+      <a:minorFont>
+        <a:latin typeface="Aptos" panose="02110004020202020204"/>
+        <a:ea typeface=""/>
+        <a:cs typeface=""/>
+        <a:font script="Jpan" typeface="游ゴシック"/>
+        <a:font script="Hang" typeface="맑은 고딕"/>
+        <a:font script="Hans" typeface="等线"/>
+        <a:font script="Hant" typeface="新細明體"/>
+        <a:font script="Arab" typeface="Arial"/>
+        <a:font script="Hebr" typeface="Arial"/>
+        <a:font script="Thai" typeface="Cordia New"/>
+        <a:font script="Ethi" typeface="Nyala"/>
+        <a:font script="Beng" typeface="Vrinda"/>
+        <a:font script="Gujr" typeface="Shruti"/>
+        <a:font script="Khmr" typeface="DaunPenh"/>
+        <a:font script="Knda" typeface="Tunga"/>
+        <a:font script="Guru" typeface="Raavi"/>
+        <a:font script="Cans" typeface="Euphemia"/>
+        <a:font script="Cher" typeface="Plantagenet Cherokee"/>
+        <a:font script="Yiii" typeface="Microsoft Yi Baiti"/>
+        <a:font script="Tibt" typeface="Microsoft Himalaya"/>
+        <a:font script="Thaa" typeface="MV Boli"/>
+        <a:font script="Deva" typeface="Mangal"/>
+        <a:font script="Telu" typeface="Gautami"/>
+        <a:font script="Taml" typeface="Latha"/>
+        <a:font script="Syrc" typeface="Estrangelo Edessa"/>
+        <a:font script="Orya" typeface="Kalinga"/>
+        <a:font script="Mlym" typeface="Kartika"/>
+        <a:font script="Laoo" typeface="DokChampa"/>
+        <a:font script="Sinh" typeface="Iskoola Pota"/>
+        <a:font script="Mong" typeface="Mongolian Baiti"/>
+        <a:font script="Viet" typeface="Arial"/>
+        <a:font script="Uigh" typeface="Microsoft Uighur"/>
+        <a:font script="Geor" typeface="Sylfaen"/>
+        <a:font script="Armn" typeface="Arial"/>
+        <a:font script="Bugi" typeface="Leelawadee UI"/>
+        <a:font script="Bopo" typeface="Microsoft JhengHei"/>
+        <a:font script="Java" typeface="Javanese Text"/>
+        <a:font script="Lisu" typeface="Segoe UI"/>
+        <a:font script="Mymr" typeface="Myanmar Text"/>
+        <a:font script="Nkoo" typeface="Ebrima"/>
+        <a:font script="Olck" typeface="Nirmala UI"/>
+        <a:font script="Osma" typeface="Ebrima"/>
+        <a:font script="Phag" typeface="Phagspa"/>
+        <a:font script="Syrn" typeface="Estrangelo Edessa"/>
+        <a:font script="Syrj" typeface="Estrangelo Edessa"/>
+        <a:font script="Syre" typeface="Estrangelo Edessa"/>
+        <a:font script="Sora" typeface="Nirmala UI"/>
+        <a:font script="Tale" typeface="Microsoft Tai Le"/>
+        <a:font script="Talu" typeface="Microsoft New Tai Lue"/>
+        <a:font script="Tfng" typeface="Ebrima"/>
+      </a:minorFont>
+    </a:fontScheme>
+    <a:fmtScheme name="Office">
+      <a:fillStyleLst>
+        <a:solidFill>
+          <a:schemeClr val="phClr"/>
+        </a:solidFill>
+        <a:gradFill rotWithShape="1">
+          <a:gsLst>
+            <a:gs pos="0">
+              <a:schemeClr val="phClr">
+                <a:lumMod val="110000"/>
+                <a:satMod val="105000"/>
+                <a:tint val="67000"/>
+              </a:schemeClr>
+            </a:gs>
+            <a:gs pos="50000">
+              <a:schemeClr val="phClr">
+                <a:lumMod val="105000"/>
+                <a:satMod val="103000"/>
+                <a:tint val="73000"/>
+              </a:schemeClr>
+            </a:gs>
+            <a:gs pos="100000">
+              <a:schemeClr val="phClr">
+                <a:lumMod val="105000"/>
+                <a:satMod val="109000"/>
+                <a:tint val="81000"/>
+              </a:schemeClr>
+            </a:gs>
+          </a:gsLst>
+          <a:lin ang="5400000" scaled="0"/>
+        </a:gradFill>
+        <a:gradFill rotWithShape="1">
+          <a:gsLst>
+            <a:gs pos="0">
+              <a:schemeClr val="phClr">
+                <a:satMod val="103000"/>
+                <a:lumMod val="102000"/>
+                <a:tint val="94000"/>
+              </a:schemeClr>
+            </a:gs>
+            <a:gs pos="50000">
+              <a:schemeClr val="phClr">
+                <a:satMod val="110000"/>
+                <a:lumMod val="100000"/>
+                <a:shade val="100000"/>
+              </a:schemeClr>
+            </a:gs>
+            <a:gs pos="100000">
+              <a:schemeClr val="phClr">
+                <a:lumMod val="99000"/>
+                <a:satMod val="120000"/>
+                <a:shade val="78000"/>
+              </a:schemeClr>
+            </a:gs>
+          </a:gsLst>
+          <a:lin ang="5400000" scaled="0"/>
+        </a:gradFill>
+      </a:fillStyleLst>
+      <a:lnStyleLst>
+        <a:ln w="12700" cap="flat" cmpd="sng" algn="ctr">
+          <a:solidFill>
+            <a:schemeClr val="phClr"/>
+          </a:solidFill>
+          <a:prstDash val="solid"/>
+          <a:miter lim="800000"/>
+        </a:ln>
+        <a:ln w="19050" cap="flat" cmpd="sng" algn="ctr">
+          <a:solidFill>
+            <a:schemeClr val="phClr"/>
+          </a:solidFill>
+          <a:prstDash val="solid"/>
+          <a:miter lim="800000"/>
+        </a:ln>
+        <a:ln w="25400" cap="flat" cmpd="sng" algn="ctr">
+          <a:solidFill>
+            <a:schemeClr val="phClr"/>
+          </a:solidFill>
+          <a:prstDash val="solid"/>
+          <a:miter lim="800000"/>
+        </a:ln>
+      </a:lnStyleLst>
+      <a:effectStyleLst>
+        <a:effectStyle>
+          <a:effectLst/>
+        </a:effectStyle>
+        <a:effectStyle>
+          <a:effectLst/>
+        </a:effectStyle>
+        <a:effectStyle>
+          <a:effectLst>
+            <a:outerShdw blurRad="57150" dist="19050" dir="5400000" algn="ctr" rotWithShape="0">
+              <a:srgbClr val="000000">
+                <a:alpha val="63000"/>
+              </a:srgbClr>
+            </a:outerShdw>
+          </a:effectLst>
+        </a:effectStyle>
+      </a:effectStyleLst>
+      <a:bgFillStyleLst>
+        <a:solidFill>
+          <a:schemeClr val="phClr"/>
+        </a:solidFill>
+        <a:solidFill>
+          <a:schemeClr val="phClr">
+            <a:tint val="95000"/>
+            <a:satMod val="170000"/>
+          </a:schemeClr>
+        </a:solidFill>
+        <a:gradFill rotWithShape="1">
+          <a:gsLst>
+            <a:gs pos="0">
+              <a:schemeClr val="phClr">
+                <a:tint val="93000"/>
+                <a:satMod val="150000"/>
+                <a:shade val="98000"/>
+                <a:lumMod val="102000"/>
+              </a:schemeClr>
+            </a:gs>
+            <a:gs pos="50000">
+              <a:schemeClr val="phClr">
+                <a:tint val="98000"/>
+                <a:satMod val="130000"/>
+                <a:shade val="90000"/>
+                <a:lumMod val="103000"/>
+              </a:schemeClr>
+            </a:gs>
+            <a:gs pos="100000">
+              <a:schemeClr val="phClr">
+                <a:shade val="63000"/>
+                <a:satMod val="120000"/>
+              </a:schemeClr>
+            </a:gs>
+          </a:gsLst>
+          <a:lin ang="5400000" scaled="0"/>
+        </a:gradFill>
+      </a:bgFillStyleLst>
+    </a:fmtScheme>
+  </a:themeElements>
+  <a:objectDefaults>
+    <a:lnDef>
+      <a:spPr/>
+      <a:bodyPr/>
+      <a:lstStyle/>
+      <a:style>
+        <a:lnRef idx="2">
+          <a:schemeClr val="accent1"/>
+        </a:lnRef>
+        <a:fillRef idx="0">
+          <a:schemeClr val="accent1"/>
+        </a:fillRef>
+        <a:effectRef idx="1">
+          <a:schemeClr val="accent1"/>
+        </a:effectRef>
+        <a:fontRef idx="minor">
+          <a:schemeClr val="tx1"/>
+        </a:fontRef>
+      </a:style>
+    </a:lnDef>
+  </a:objectDefaults>
+  <a:extraClrSchemeLst/>
+  <a:extLst>
+    <a:ext uri="{05A4C25C-085E-4340-85A3-A5531E510DB2}">
+      <thm15:themeFamily xmlns:thm15="http://schemas.microsoft.com/office/thememl/2012/main" name="Office Theme" id="{2E142A2C-CD16-42D6-873A-C26D2A0506FA}" vid="{1BDDFF52-6CD6-40A5-AB3C-68EB2F1E4D0A}"/>
+    </a:ext>
+  </a:extLst>
+</a:theme>
 </file>